--- a/fig/chapter4/MaskTST特征学习模块.pptx
+++ b/fig/chapter4/MaskTST特征学习模块.pptx
@@ -243,7 +243,7 @@
           <a:p>
             <a:fld id="{5265E4E4-D6B5-457E-B6F2-B2625A9D9E69}" type="datetimeFigureOut">
               <a:rPr lang="zh-CN" altLang="en-US" smtClean="0"/>
-              <a:t>2026/3/12</a:t>
+              <a:t>2026/3/17</a:t>
             </a:fld>
             <a:endParaRPr lang="zh-CN" altLang="en-US"/>
           </a:p>
@@ -413,7 +413,7 @@
           <a:p>
             <a:fld id="{5265E4E4-D6B5-457E-B6F2-B2625A9D9E69}" type="datetimeFigureOut">
               <a:rPr lang="zh-CN" altLang="en-US" smtClean="0"/>
-              <a:t>2026/3/12</a:t>
+              <a:t>2026/3/17</a:t>
             </a:fld>
             <a:endParaRPr lang="zh-CN" altLang="en-US"/>
           </a:p>
@@ -593,7 +593,7 @@
           <a:p>
             <a:fld id="{5265E4E4-D6B5-457E-B6F2-B2625A9D9E69}" type="datetimeFigureOut">
               <a:rPr lang="zh-CN" altLang="en-US" smtClean="0"/>
-              <a:t>2026/3/12</a:t>
+              <a:t>2026/3/17</a:t>
             </a:fld>
             <a:endParaRPr lang="zh-CN" altLang="en-US"/>
           </a:p>
@@ -763,7 +763,7 @@
           <a:p>
             <a:fld id="{5265E4E4-D6B5-457E-B6F2-B2625A9D9E69}" type="datetimeFigureOut">
               <a:rPr lang="zh-CN" altLang="en-US" smtClean="0"/>
-              <a:t>2026/3/12</a:t>
+              <a:t>2026/3/17</a:t>
             </a:fld>
             <a:endParaRPr lang="zh-CN" altLang="en-US"/>
           </a:p>
@@ -1009,7 +1009,7 @@
           <a:p>
             <a:fld id="{5265E4E4-D6B5-457E-B6F2-B2625A9D9E69}" type="datetimeFigureOut">
               <a:rPr lang="zh-CN" altLang="en-US" smtClean="0"/>
-              <a:t>2026/3/12</a:t>
+              <a:t>2026/3/17</a:t>
             </a:fld>
             <a:endParaRPr lang="zh-CN" altLang="en-US"/>
           </a:p>
@@ -1241,7 +1241,7 @@
           <a:p>
             <a:fld id="{5265E4E4-D6B5-457E-B6F2-B2625A9D9E69}" type="datetimeFigureOut">
               <a:rPr lang="zh-CN" altLang="en-US" smtClean="0"/>
-              <a:t>2026/3/12</a:t>
+              <a:t>2026/3/17</a:t>
             </a:fld>
             <a:endParaRPr lang="zh-CN" altLang="en-US"/>
           </a:p>
@@ -1608,7 +1608,7 @@
           <a:p>
             <a:fld id="{5265E4E4-D6B5-457E-B6F2-B2625A9D9E69}" type="datetimeFigureOut">
               <a:rPr lang="zh-CN" altLang="en-US" smtClean="0"/>
-              <a:t>2026/3/12</a:t>
+              <a:t>2026/3/17</a:t>
             </a:fld>
             <a:endParaRPr lang="zh-CN" altLang="en-US"/>
           </a:p>
@@ -1726,7 +1726,7 @@
           <a:p>
             <a:fld id="{5265E4E4-D6B5-457E-B6F2-B2625A9D9E69}" type="datetimeFigureOut">
               <a:rPr lang="zh-CN" altLang="en-US" smtClean="0"/>
-              <a:t>2026/3/12</a:t>
+              <a:t>2026/3/17</a:t>
             </a:fld>
             <a:endParaRPr lang="zh-CN" altLang="en-US"/>
           </a:p>
@@ -1821,7 +1821,7 @@
           <a:p>
             <a:fld id="{5265E4E4-D6B5-457E-B6F2-B2625A9D9E69}" type="datetimeFigureOut">
               <a:rPr lang="zh-CN" altLang="en-US" smtClean="0"/>
-              <a:t>2026/3/12</a:t>
+              <a:t>2026/3/17</a:t>
             </a:fld>
             <a:endParaRPr lang="zh-CN" altLang="en-US"/>
           </a:p>
@@ -2098,7 +2098,7 @@
           <a:p>
             <a:fld id="{5265E4E4-D6B5-457E-B6F2-B2625A9D9E69}" type="datetimeFigureOut">
               <a:rPr lang="zh-CN" altLang="en-US" smtClean="0"/>
-              <a:t>2026/3/12</a:t>
+              <a:t>2026/3/17</a:t>
             </a:fld>
             <a:endParaRPr lang="zh-CN" altLang="en-US"/>
           </a:p>
@@ -2355,7 +2355,7 @@
           <a:p>
             <a:fld id="{5265E4E4-D6B5-457E-B6F2-B2625A9D9E69}" type="datetimeFigureOut">
               <a:rPr lang="zh-CN" altLang="en-US" smtClean="0"/>
-              <a:t>2026/3/12</a:t>
+              <a:t>2026/3/17</a:t>
             </a:fld>
             <a:endParaRPr lang="zh-CN" altLang="en-US"/>
           </a:p>
@@ -2568,7 +2568,7 @@
           <a:p>
             <a:fld id="{5265E4E4-D6B5-457E-B6F2-B2625A9D9E69}" type="datetimeFigureOut">
               <a:rPr lang="zh-CN" altLang="en-US" smtClean="0"/>
-              <a:t>2026/3/12</a:t>
+              <a:t>2026/3/17</a:t>
             </a:fld>
             <a:endParaRPr lang="zh-CN" altLang="en-US"/>
           </a:p>
@@ -3030,8 +3030,8 @@
           </a:p>
         </p:txBody>
       </p:sp>
-      <mc:AlternateContent xmlns:mc="http://schemas.openxmlformats.org/markup-compatibility/2006">
-        <mc:Choice xmlns:a14="http://schemas.microsoft.com/office/drawing/2010/main" Requires="a14">
+      <mc:AlternateContent xmlns:mc="http://schemas.openxmlformats.org/markup-compatibility/2006" xmlns:a14="http://schemas.microsoft.com/office/drawing/2010/main">
+        <mc:Choice Requires="a14">
           <p:graphicFrame>
             <p:nvGraphicFramePr>
               <p:cNvPr id="7" name="表格 7">
@@ -3641,7 +3641,7 @@
             </a:graphic>
           </p:graphicFrame>
         </mc:Choice>
-        <mc:Fallback>
+        <mc:Fallback xmlns="">
           <p:graphicFrame>
             <p:nvGraphicFramePr>
               <p:cNvPr id="7" name="表格 7">
@@ -4027,8 +4027,8 @@
           </p:graphicFrame>
         </mc:Fallback>
       </mc:AlternateContent>
-      <mc:AlternateContent xmlns:mc="http://schemas.openxmlformats.org/markup-compatibility/2006">
-        <mc:Choice xmlns:a14="http://schemas.microsoft.com/office/drawing/2010/main" Requires="a14">
+      <mc:AlternateContent xmlns:mc="http://schemas.openxmlformats.org/markup-compatibility/2006" xmlns:a14="http://schemas.microsoft.com/office/drawing/2010/main">
+        <mc:Choice Requires="a14">
           <p:sp>
             <p:nvSpPr>
               <p:cNvPr id="9" name="文本框 8">
@@ -4082,7 +4082,7 @@
             </p:txBody>
           </p:sp>
         </mc:Choice>
-        <mc:Fallback>
+        <mc:Fallback xmlns="">
           <p:sp>
             <p:nvSpPr>
               <p:cNvPr id="9" name="文本框 8">
@@ -4127,8 +4127,8 @@
           </p:sp>
         </mc:Fallback>
       </mc:AlternateContent>
-      <mc:AlternateContent xmlns:mc="http://schemas.openxmlformats.org/markup-compatibility/2006">
-        <mc:Choice xmlns:a14="http://schemas.microsoft.com/office/drawing/2010/main" Requires="a14">
+      <mc:AlternateContent xmlns:mc="http://schemas.openxmlformats.org/markup-compatibility/2006" xmlns:a14="http://schemas.microsoft.com/office/drawing/2010/main">
+        <mc:Choice Requires="a14">
           <p:graphicFrame>
             <p:nvGraphicFramePr>
               <p:cNvPr id="10" name="表格 7">
@@ -4668,7 +4668,7 @@
             </a:graphic>
           </p:graphicFrame>
         </mc:Choice>
-        <mc:Fallback>
+        <mc:Fallback xmlns="">
           <p:graphicFrame>
             <p:nvGraphicFramePr>
               <p:cNvPr id="10" name="表格 7">
@@ -5468,8 +5468,8 @@
           </a:p>
         </p:txBody>
       </p:sp>
-      <mc:AlternateContent xmlns:mc="http://schemas.openxmlformats.org/markup-compatibility/2006">
-        <mc:Choice xmlns:a14="http://schemas.microsoft.com/office/drawing/2010/main" Requires="a14">
+      <mc:AlternateContent xmlns:mc="http://schemas.openxmlformats.org/markup-compatibility/2006" xmlns:a14="http://schemas.microsoft.com/office/drawing/2010/main">
+        <mc:Choice Requires="a14">
           <p:sp>
             <p:nvSpPr>
               <p:cNvPr id="24" name="文本框 23">
@@ -5551,7 +5551,7 @@
             </p:txBody>
           </p:sp>
         </mc:Choice>
-        <mc:Fallback>
+        <mc:Fallback xmlns="">
           <p:sp>
             <p:nvSpPr>
               <p:cNvPr id="24" name="文本框 23">
@@ -5944,8 +5944,8 @@
           </a:p>
         </p:txBody>
       </p:sp>
-      <mc:AlternateContent xmlns:mc="http://schemas.openxmlformats.org/markup-compatibility/2006">
-        <mc:Choice xmlns:a14="http://schemas.microsoft.com/office/drawing/2010/main" Requires="a14">
+      <mc:AlternateContent xmlns:mc="http://schemas.openxmlformats.org/markup-compatibility/2006" xmlns:a14="http://schemas.microsoft.com/office/drawing/2010/main">
+        <mc:Choice Requires="a14">
           <p:sp>
             <p:nvSpPr>
               <p:cNvPr id="33" name="文本框 32">
@@ -6015,7 +6015,7 @@
             </p:txBody>
           </p:sp>
         </mc:Choice>
-        <mc:Fallback>
+        <mc:Fallback xmlns="">
           <p:sp>
             <p:nvSpPr>
               <p:cNvPr id="33" name="文本框 32">
@@ -6165,8 +6165,8 @@
           </a:p>
         </p:txBody>
       </p:sp>
-      <mc:AlternateContent xmlns:mc="http://schemas.openxmlformats.org/markup-compatibility/2006">
-        <mc:Choice xmlns:a14="http://schemas.microsoft.com/office/drawing/2010/main" Requires="a14">
+      <mc:AlternateContent xmlns:mc="http://schemas.openxmlformats.org/markup-compatibility/2006" xmlns:a14="http://schemas.microsoft.com/office/drawing/2010/main">
+        <mc:Choice Requires="a14">
           <p:graphicFrame>
             <p:nvGraphicFramePr>
               <p:cNvPr id="43" name="表格 7">
@@ -6851,7 +6851,7 @@
             </a:graphic>
           </p:graphicFrame>
         </mc:Choice>
-        <mc:Fallback>
+        <mc:Fallback xmlns="">
           <p:graphicFrame>
             <p:nvGraphicFramePr>
               <p:cNvPr id="43" name="表格 7">
@@ -7237,8 +7237,8 @@
           </p:graphicFrame>
         </mc:Fallback>
       </mc:AlternateContent>
-      <mc:AlternateContent xmlns:mc="http://schemas.openxmlformats.org/markup-compatibility/2006">
-        <mc:Choice xmlns:a14="http://schemas.microsoft.com/office/drawing/2010/main" Requires="a14">
+      <mc:AlternateContent xmlns:mc="http://schemas.openxmlformats.org/markup-compatibility/2006" xmlns:a14="http://schemas.microsoft.com/office/drawing/2010/main">
+        <mc:Choice Requires="a14">
           <p:sp>
             <p:nvSpPr>
               <p:cNvPr id="44" name="文本框 43">
@@ -7310,7 +7310,7 @@
             </p:txBody>
           </p:sp>
         </mc:Choice>
-        <mc:Fallback>
+        <mc:Fallback xmlns="">
           <p:sp>
             <p:nvSpPr>
               <p:cNvPr id="44" name="文本框 43">
@@ -7488,8 +7488,8 @@
           </a:p>
         </p:txBody>
       </p:sp>
-      <mc:AlternateContent xmlns:mc="http://schemas.openxmlformats.org/markup-compatibility/2006">
-        <mc:Choice xmlns:a14="http://schemas.microsoft.com/office/drawing/2010/main" Requires="a14">
+      <mc:AlternateContent xmlns:mc="http://schemas.openxmlformats.org/markup-compatibility/2006" xmlns:a14="http://schemas.microsoft.com/office/drawing/2010/main">
+        <mc:Choice Requires="a14">
           <p:sp>
             <p:nvSpPr>
               <p:cNvPr id="51" name="文本框 50">
@@ -7544,7 +7544,7 @@
             </p:txBody>
           </p:sp>
         </mc:Choice>
-        <mc:Fallback>
+        <mc:Fallback xmlns="">
           <p:sp>
             <p:nvSpPr>
               <p:cNvPr id="51" name="文本框 50">
@@ -7643,8 +7643,8 @@
           </a:p>
         </p:txBody>
       </p:sp>
-      <mc:AlternateContent xmlns:mc="http://schemas.openxmlformats.org/markup-compatibility/2006">
-        <mc:Choice xmlns:a14="http://schemas.microsoft.com/office/drawing/2010/main" Requires="a14">
+      <mc:AlternateContent xmlns:mc="http://schemas.openxmlformats.org/markup-compatibility/2006" xmlns:a14="http://schemas.microsoft.com/office/drawing/2010/main">
+        <mc:Choice Requires="a14">
           <p:sp>
             <p:nvSpPr>
               <p:cNvPr id="53" name="文本框 52">
@@ -7719,7 +7719,7 @@
             </p:txBody>
           </p:sp>
         </mc:Choice>
-        <mc:Fallback>
+        <mc:Fallback xmlns="">
           <p:sp>
             <p:nvSpPr>
               <p:cNvPr id="53" name="文本框 52">
@@ -7971,6 +7971,44 @@
                 <a:ea typeface="宋体" panose="02010600030101010101" pitchFamily="2" charset="-122"/>
               </a:rPr>
               <a:t>特征提取</a:t>
+            </a:r>
+          </a:p>
+        </p:txBody>
+      </p:sp>
+      <p:sp>
+        <p:nvSpPr>
+          <p:cNvPr id="41" name="文本框 40">
+            <a:extLst>
+              <a:ext uri="{FF2B5EF4-FFF2-40B4-BE49-F238E27FC236}">
+                <a16:creationId xmlns:a16="http://schemas.microsoft.com/office/drawing/2014/main" id="{5654D89B-8962-4E14-A405-9B2DF20A63E4}"/>
+              </a:ext>
+            </a:extLst>
+          </p:cNvPr>
+          <p:cNvSpPr txBox="1"/>
+          <p:nvPr/>
+        </p:nvSpPr>
+        <p:spPr>
+          <a:xfrm>
+            <a:off x="8585917" y="1041740"/>
+            <a:ext cx="800219" cy="276999"/>
+          </a:xfrm>
+          <a:prstGeom prst="rect">
+            <a:avLst/>
+          </a:prstGeom>
+          <a:noFill/>
+        </p:spPr>
+        <p:txBody>
+          <a:bodyPr wrap="none" rtlCol="0">
+            <a:spAutoFit/>
+          </a:bodyPr>
+          <a:lstStyle/>
+          <a:p>
+            <a:r>
+              <a:rPr lang="zh-CN" altLang="en-US" sz="1200" dirty="0">
+                <a:latin typeface="宋体" panose="02010600030101010101" pitchFamily="2" charset="-122"/>
+                <a:ea typeface="宋体" panose="02010600030101010101" pitchFamily="2" charset="-122"/>
+              </a:rPr>
+              <a:t>隐藏表示</a:t>
             </a:r>
           </a:p>
         </p:txBody>

--- a/fig/chapter4/MaskTST特征学习模块.pptx
+++ b/fig/chapter4/MaskTST特征学习模块.pptx
@@ -2,12 +2,12 @@
 <file path=ppt/presentation.xml><?xml version="1.0" encoding="utf-8"?>
 <p:presentation xmlns:a="http://schemas.openxmlformats.org/drawingml/2006/main" xmlns:r="http://schemas.openxmlformats.org/officeDocument/2006/relationships" xmlns:p="http://schemas.openxmlformats.org/presentationml/2006/main" saveSubsetFonts="1">
   <p:sldMasterIdLst>
-    <p:sldMasterId id="2147483660" r:id="rId1"/>
+    <p:sldMasterId id="2147483672" r:id="rId1"/>
   </p:sldMasterIdLst>
   <p:sldIdLst>
     <p:sldId id="256" r:id="rId2"/>
   </p:sldIdLst>
-  <p:sldSz cx="9359900" cy="4319588"/>
+  <p:sldSz cx="10080625" cy="4319588"/>
   <p:notesSz cx="6858000" cy="9144000"/>
   <p:defaultTextStyle>
     <a:defPPr>
@@ -141,8 +141,8 @@
         </p:nvSpPr>
         <p:spPr>
           <a:xfrm>
-            <a:off x="1169988" y="706933"/>
-            <a:ext cx="7019925" cy="1503857"/>
+            <a:off x="1260078" y="706933"/>
+            <a:ext cx="7560469" cy="1503857"/>
           </a:xfrm>
         </p:spPr>
         <p:txBody>
@@ -173,8 +173,8 @@
         </p:nvSpPr>
         <p:spPr>
           <a:xfrm>
-            <a:off x="1169988" y="2268784"/>
-            <a:ext cx="7019925" cy="1042900"/>
+            <a:off x="1260078" y="2268784"/>
+            <a:ext cx="7560469" cy="1042900"/>
           </a:xfrm>
         </p:spPr>
         <p:txBody>
@@ -243,7 +243,7 @@
           <a:p>
             <a:fld id="{5265E4E4-D6B5-457E-B6F2-B2625A9D9E69}" type="datetimeFigureOut">
               <a:rPr lang="zh-CN" altLang="en-US" smtClean="0"/>
-              <a:t>2026/3/17</a:t>
+              <a:t>2026/3/19</a:t>
             </a:fld>
             <a:endParaRPr lang="zh-CN" altLang="en-US"/>
           </a:p>
@@ -294,7 +294,7 @@
     </p:spTree>
     <p:extLst>
       <p:ext uri="{BB962C8B-B14F-4D97-AF65-F5344CB8AC3E}">
-        <p14:creationId xmlns:p14="http://schemas.microsoft.com/office/powerpoint/2010/main" val="2692144022"/>
+        <p14:creationId xmlns:p14="http://schemas.microsoft.com/office/powerpoint/2010/main" val="3316583632"/>
       </p:ext>
     </p:extLst>
   </p:cSld>
@@ -413,7 +413,7 @@
           <a:p>
             <a:fld id="{5265E4E4-D6B5-457E-B6F2-B2625A9D9E69}" type="datetimeFigureOut">
               <a:rPr lang="zh-CN" altLang="en-US" smtClean="0"/>
-              <a:t>2026/3/17</a:t>
+              <a:t>2026/3/19</a:t>
             </a:fld>
             <a:endParaRPr lang="zh-CN" altLang="en-US"/>
           </a:p>
@@ -464,7 +464,7 @@
     </p:spTree>
     <p:extLst>
       <p:ext uri="{BB962C8B-B14F-4D97-AF65-F5344CB8AC3E}">
-        <p14:creationId xmlns:p14="http://schemas.microsoft.com/office/powerpoint/2010/main" val="3362274316"/>
+        <p14:creationId xmlns:p14="http://schemas.microsoft.com/office/powerpoint/2010/main" val="3950740908"/>
       </p:ext>
     </p:extLst>
   </p:cSld>
@@ -503,8 +503,8 @@
         </p:nvSpPr>
         <p:spPr>
           <a:xfrm>
-            <a:off x="6698179" y="229978"/>
-            <a:ext cx="2018228" cy="3660651"/>
+            <a:off x="7213947" y="229978"/>
+            <a:ext cx="2173635" cy="3660651"/>
           </a:xfrm>
         </p:spPr>
         <p:txBody>
@@ -531,8 +531,8 @@
         </p:nvSpPr>
         <p:spPr>
           <a:xfrm>
-            <a:off x="643493" y="229978"/>
-            <a:ext cx="5937687" cy="3660651"/>
+            <a:off x="693043" y="229978"/>
+            <a:ext cx="6394896" cy="3660651"/>
           </a:xfrm>
         </p:spPr>
         <p:txBody>
@@ -593,7 +593,7 @@
           <a:p>
             <a:fld id="{5265E4E4-D6B5-457E-B6F2-B2625A9D9E69}" type="datetimeFigureOut">
               <a:rPr lang="zh-CN" altLang="en-US" smtClean="0"/>
-              <a:t>2026/3/17</a:t>
+              <a:t>2026/3/19</a:t>
             </a:fld>
             <a:endParaRPr lang="zh-CN" altLang="en-US"/>
           </a:p>
@@ -644,7 +644,7 @@
     </p:spTree>
     <p:extLst>
       <p:ext uri="{BB962C8B-B14F-4D97-AF65-F5344CB8AC3E}">
-        <p14:creationId xmlns:p14="http://schemas.microsoft.com/office/powerpoint/2010/main" val="2742704360"/>
+        <p14:creationId xmlns:p14="http://schemas.microsoft.com/office/powerpoint/2010/main" val="61000045"/>
       </p:ext>
     </p:extLst>
   </p:cSld>
@@ -763,7 +763,7 @@
           <a:p>
             <a:fld id="{5265E4E4-D6B5-457E-B6F2-B2625A9D9E69}" type="datetimeFigureOut">
               <a:rPr lang="zh-CN" altLang="en-US" smtClean="0"/>
-              <a:t>2026/3/17</a:t>
+              <a:t>2026/3/19</a:t>
             </a:fld>
             <a:endParaRPr lang="zh-CN" altLang="en-US"/>
           </a:p>
@@ -814,7 +814,7 @@
     </p:spTree>
     <p:extLst>
       <p:ext uri="{BB962C8B-B14F-4D97-AF65-F5344CB8AC3E}">
-        <p14:creationId xmlns:p14="http://schemas.microsoft.com/office/powerpoint/2010/main" val="1843429049"/>
+        <p14:creationId xmlns:p14="http://schemas.microsoft.com/office/powerpoint/2010/main" val="399756727"/>
       </p:ext>
     </p:extLst>
   </p:cSld>
@@ -853,8 +853,8 @@
         </p:nvSpPr>
         <p:spPr>
           <a:xfrm>
-            <a:off x="638618" y="1076898"/>
-            <a:ext cx="8072914" cy="1796828"/>
+            <a:off x="687793" y="1076898"/>
+            <a:ext cx="8694539" cy="1796828"/>
           </a:xfrm>
         </p:spPr>
         <p:txBody>
@@ -885,8 +885,8 @@
         </p:nvSpPr>
         <p:spPr>
           <a:xfrm>
-            <a:off x="638618" y="2890725"/>
-            <a:ext cx="8072914" cy="944910"/>
+            <a:off x="687793" y="2890725"/>
+            <a:ext cx="8694539" cy="944910"/>
           </a:xfrm>
         </p:spPr>
         <p:txBody>
@@ -1009,7 +1009,7 @@
           <a:p>
             <a:fld id="{5265E4E4-D6B5-457E-B6F2-B2625A9D9E69}" type="datetimeFigureOut">
               <a:rPr lang="zh-CN" altLang="en-US" smtClean="0"/>
-              <a:t>2026/3/17</a:t>
+              <a:t>2026/3/19</a:t>
             </a:fld>
             <a:endParaRPr lang="zh-CN" altLang="en-US"/>
           </a:p>
@@ -1060,7 +1060,7 @@
     </p:spTree>
     <p:extLst>
       <p:ext uri="{BB962C8B-B14F-4D97-AF65-F5344CB8AC3E}">
-        <p14:creationId xmlns:p14="http://schemas.microsoft.com/office/powerpoint/2010/main" val="1126826549"/>
+        <p14:creationId xmlns:p14="http://schemas.microsoft.com/office/powerpoint/2010/main" val="680519574"/>
       </p:ext>
     </p:extLst>
   </p:cSld>
@@ -1122,8 +1122,8 @@
         </p:nvSpPr>
         <p:spPr>
           <a:xfrm>
-            <a:off x="643493" y="1149890"/>
-            <a:ext cx="3977958" cy="2740739"/>
+            <a:off x="693043" y="1149890"/>
+            <a:ext cx="4284266" cy="2740739"/>
           </a:xfrm>
         </p:spPr>
         <p:txBody>
@@ -1179,8 +1179,8 @@
         </p:nvSpPr>
         <p:spPr>
           <a:xfrm>
-            <a:off x="4738449" y="1149890"/>
-            <a:ext cx="3977958" cy="2740739"/>
+            <a:off x="5103316" y="1149890"/>
+            <a:ext cx="4284266" cy="2740739"/>
           </a:xfrm>
         </p:spPr>
         <p:txBody>
@@ -1241,7 +1241,7 @@
           <a:p>
             <a:fld id="{5265E4E4-D6B5-457E-B6F2-B2625A9D9E69}" type="datetimeFigureOut">
               <a:rPr lang="zh-CN" altLang="en-US" smtClean="0"/>
-              <a:t>2026/3/17</a:t>
+              <a:t>2026/3/19</a:t>
             </a:fld>
             <a:endParaRPr lang="zh-CN" altLang="en-US"/>
           </a:p>
@@ -1292,7 +1292,7 @@
     </p:spTree>
     <p:extLst>
       <p:ext uri="{BB962C8B-B14F-4D97-AF65-F5344CB8AC3E}">
-        <p14:creationId xmlns:p14="http://schemas.microsoft.com/office/powerpoint/2010/main" val="2008394596"/>
+        <p14:creationId xmlns:p14="http://schemas.microsoft.com/office/powerpoint/2010/main" val="1753035163"/>
       </p:ext>
     </p:extLst>
   </p:cSld>
@@ -1331,8 +1331,8 @@
         </p:nvSpPr>
         <p:spPr>
           <a:xfrm>
-            <a:off x="644712" y="229978"/>
-            <a:ext cx="8072914" cy="834921"/>
+            <a:off x="694356" y="229978"/>
+            <a:ext cx="8694539" cy="834921"/>
           </a:xfrm>
         </p:spPr>
         <p:txBody>
@@ -1359,8 +1359,8 @@
         </p:nvSpPr>
         <p:spPr>
           <a:xfrm>
-            <a:off x="644713" y="1058899"/>
-            <a:ext cx="3959676" cy="518950"/>
+            <a:off x="694357" y="1058899"/>
+            <a:ext cx="4264576" cy="518950"/>
           </a:xfrm>
         </p:spPr>
         <p:txBody>
@@ -1424,8 +1424,8 @@
         </p:nvSpPr>
         <p:spPr>
           <a:xfrm>
-            <a:off x="644713" y="1577849"/>
-            <a:ext cx="3959676" cy="2320779"/>
+            <a:off x="694357" y="1577849"/>
+            <a:ext cx="4264576" cy="2320779"/>
           </a:xfrm>
         </p:spPr>
         <p:txBody>
@@ -1481,8 +1481,8 @@
         </p:nvSpPr>
         <p:spPr>
           <a:xfrm>
-            <a:off x="4738449" y="1058899"/>
-            <a:ext cx="3979177" cy="518950"/>
+            <a:off x="5103316" y="1058899"/>
+            <a:ext cx="4285579" cy="518950"/>
           </a:xfrm>
         </p:spPr>
         <p:txBody>
@@ -1546,8 +1546,8 @@
         </p:nvSpPr>
         <p:spPr>
           <a:xfrm>
-            <a:off x="4738449" y="1577849"/>
-            <a:ext cx="3979177" cy="2320779"/>
+            <a:off x="5103316" y="1577849"/>
+            <a:ext cx="4285579" cy="2320779"/>
           </a:xfrm>
         </p:spPr>
         <p:txBody>
@@ -1608,7 +1608,7 @@
           <a:p>
             <a:fld id="{5265E4E4-D6B5-457E-B6F2-B2625A9D9E69}" type="datetimeFigureOut">
               <a:rPr lang="zh-CN" altLang="en-US" smtClean="0"/>
-              <a:t>2026/3/17</a:t>
+              <a:t>2026/3/19</a:t>
             </a:fld>
             <a:endParaRPr lang="zh-CN" altLang="en-US"/>
           </a:p>
@@ -1659,7 +1659,7 @@
     </p:spTree>
     <p:extLst>
       <p:ext uri="{BB962C8B-B14F-4D97-AF65-F5344CB8AC3E}">
-        <p14:creationId xmlns:p14="http://schemas.microsoft.com/office/powerpoint/2010/main" val="256228059"/>
+        <p14:creationId xmlns:p14="http://schemas.microsoft.com/office/powerpoint/2010/main" val="1001073781"/>
       </p:ext>
     </p:extLst>
   </p:cSld>
@@ -1726,7 +1726,7 @@
           <a:p>
             <a:fld id="{5265E4E4-D6B5-457E-B6F2-B2625A9D9E69}" type="datetimeFigureOut">
               <a:rPr lang="zh-CN" altLang="en-US" smtClean="0"/>
-              <a:t>2026/3/17</a:t>
+              <a:t>2026/3/19</a:t>
             </a:fld>
             <a:endParaRPr lang="zh-CN" altLang="en-US"/>
           </a:p>
@@ -1777,7 +1777,7 @@
     </p:spTree>
     <p:extLst>
       <p:ext uri="{BB962C8B-B14F-4D97-AF65-F5344CB8AC3E}">
-        <p14:creationId xmlns:p14="http://schemas.microsoft.com/office/powerpoint/2010/main" val="2095651911"/>
+        <p14:creationId xmlns:p14="http://schemas.microsoft.com/office/powerpoint/2010/main" val="3811881861"/>
       </p:ext>
     </p:extLst>
   </p:cSld>
@@ -1821,7 +1821,7 @@
           <a:p>
             <a:fld id="{5265E4E4-D6B5-457E-B6F2-B2625A9D9E69}" type="datetimeFigureOut">
               <a:rPr lang="zh-CN" altLang="en-US" smtClean="0"/>
-              <a:t>2026/3/17</a:t>
+              <a:t>2026/3/19</a:t>
             </a:fld>
             <a:endParaRPr lang="zh-CN" altLang="en-US"/>
           </a:p>
@@ -1872,7 +1872,7 @@
     </p:spTree>
     <p:extLst>
       <p:ext uri="{BB962C8B-B14F-4D97-AF65-F5344CB8AC3E}">
-        <p14:creationId xmlns:p14="http://schemas.microsoft.com/office/powerpoint/2010/main" val="1951051757"/>
+        <p14:creationId xmlns:p14="http://schemas.microsoft.com/office/powerpoint/2010/main" val="1992970938"/>
       </p:ext>
     </p:extLst>
   </p:cSld>
@@ -1911,8 +1911,8 @@
         </p:nvSpPr>
         <p:spPr>
           <a:xfrm>
-            <a:off x="644713" y="287972"/>
-            <a:ext cx="3018811" cy="1007904"/>
+            <a:off x="694356" y="287972"/>
+            <a:ext cx="3251264" cy="1007904"/>
           </a:xfrm>
         </p:spPr>
         <p:txBody>
@@ -1943,8 +1943,8 @@
         </p:nvSpPr>
         <p:spPr>
           <a:xfrm>
-            <a:off x="3979177" y="621941"/>
-            <a:ext cx="4738449" cy="3069707"/>
+            <a:off x="4285579" y="621941"/>
+            <a:ext cx="5103316" cy="3069707"/>
           </a:xfrm>
         </p:spPr>
         <p:txBody>
@@ -2028,8 +2028,8 @@
         </p:nvSpPr>
         <p:spPr>
           <a:xfrm>
-            <a:off x="644713" y="1295877"/>
-            <a:ext cx="3018811" cy="2400771"/>
+            <a:off x="694356" y="1295877"/>
+            <a:ext cx="3251264" cy="2400771"/>
           </a:xfrm>
         </p:spPr>
         <p:txBody>
@@ -2098,7 +2098,7 @@
           <a:p>
             <a:fld id="{5265E4E4-D6B5-457E-B6F2-B2625A9D9E69}" type="datetimeFigureOut">
               <a:rPr lang="zh-CN" altLang="en-US" smtClean="0"/>
-              <a:t>2026/3/17</a:t>
+              <a:t>2026/3/19</a:t>
             </a:fld>
             <a:endParaRPr lang="zh-CN" altLang="en-US"/>
           </a:p>
@@ -2149,7 +2149,7 @@
     </p:spTree>
     <p:extLst>
       <p:ext uri="{BB962C8B-B14F-4D97-AF65-F5344CB8AC3E}">
-        <p14:creationId xmlns:p14="http://schemas.microsoft.com/office/powerpoint/2010/main" val="977874032"/>
+        <p14:creationId xmlns:p14="http://schemas.microsoft.com/office/powerpoint/2010/main" val="1666474894"/>
       </p:ext>
     </p:extLst>
   </p:cSld>
@@ -2188,8 +2188,8 @@
         </p:nvSpPr>
         <p:spPr>
           <a:xfrm>
-            <a:off x="644713" y="287972"/>
-            <a:ext cx="3018811" cy="1007904"/>
+            <a:off x="694356" y="287972"/>
+            <a:ext cx="3251264" cy="1007904"/>
           </a:xfrm>
         </p:spPr>
         <p:txBody>
@@ -2220,8 +2220,8 @@
         </p:nvSpPr>
         <p:spPr>
           <a:xfrm>
-            <a:off x="3979177" y="621941"/>
-            <a:ext cx="4738449" cy="3069707"/>
+            <a:off x="4285579" y="621941"/>
+            <a:ext cx="5103316" cy="3069707"/>
           </a:xfrm>
         </p:spPr>
         <p:txBody>
@@ -2285,8 +2285,8 @@
         </p:nvSpPr>
         <p:spPr>
           <a:xfrm>
-            <a:off x="644713" y="1295877"/>
-            <a:ext cx="3018811" cy="2400771"/>
+            <a:off x="694356" y="1295877"/>
+            <a:ext cx="3251264" cy="2400771"/>
           </a:xfrm>
         </p:spPr>
         <p:txBody>
@@ -2355,7 +2355,7 @@
           <a:p>
             <a:fld id="{5265E4E4-D6B5-457E-B6F2-B2625A9D9E69}" type="datetimeFigureOut">
               <a:rPr lang="zh-CN" altLang="en-US" smtClean="0"/>
-              <a:t>2026/3/17</a:t>
+              <a:t>2026/3/19</a:t>
             </a:fld>
             <a:endParaRPr lang="zh-CN" altLang="en-US"/>
           </a:p>
@@ -2406,7 +2406,7 @@
     </p:spTree>
     <p:extLst>
       <p:ext uri="{BB962C8B-B14F-4D97-AF65-F5344CB8AC3E}">
-        <p14:creationId xmlns:p14="http://schemas.microsoft.com/office/powerpoint/2010/main" val="3336062398"/>
+        <p14:creationId xmlns:p14="http://schemas.microsoft.com/office/powerpoint/2010/main" val="2736964477"/>
       </p:ext>
     </p:extLst>
   </p:cSld>
@@ -2450,8 +2450,8 @@
         </p:nvSpPr>
         <p:spPr>
           <a:xfrm>
-            <a:off x="643493" y="229978"/>
-            <a:ext cx="8072914" cy="834921"/>
+            <a:off x="693043" y="229978"/>
+            <a:ext cx="8694539" cy="834921"/>
           </a:xfrm>
           <a:prstGeom prst="rect">
             <a:avLst/>
@@ -2483,8 +2483,8 @@
         </p:nvSpPr>
         <p:spPr>
           <a:xfrm>
-            <a:off x="643493" y="1149890"/>
-            <a:ext cx="8072914" cy="2740739"/>
+            <a:off x="693043" y="1149890"/>
+            <a:ext cx="8694539" cy="2740739"/>
           </a:xfrm>
           <a:prstGeom prst="rect">
             <a:avLst/>
@@ -2545,8 +2545,8 @@
         </p:nvSpPr>
         <p:spPr>
           <a:xfrm>
-            <a:off x="643493" y="4003618"/>
-            <a:ext cx="2105978" cy="229978"/>
+            <a:off x="693043" y="4003618"/>
+            <a:ext cx="2268141" cy="229978"/>
           </a:xfrm>
           <a:prstGeom prst="rect">
             <a:avLst/>
@@ -2568,7 +2568,7 @@
           <a:p>
             <a:fld id="{5265E4E4-D6B5-457E-B6F2-B2625A9D9E69}" type="datetimeFigureOut">
               <a:rPr lang="zh-CN" altLang="en-US" smtClean="0"/>
-              <a:t>2026/3/17</a:t>
+              <a:t>2026/3/19</a:t>
             </a:fld>
             <a:endParaRPr lang="zh-CN" altLang="en-US"/>
           </a:p>
@@ -2586,8 +2586,8 @@
         </p:nvSpPr>
         <p:spPr>
           <a:xfrm>
-            <a:off x="3100467" y="4003618"/>
-            <a:ext cx="3158966" cy="229978"/>
+            <a:off x="3339207" y="4003618"/>
+            <a:ext cx="3402211" cy="229978"/>
           </a:xfrm>
           <a:prstGeom prst="rect">
             <a:avLst/>
@@ -2623,8 +2623,8 @@
         </p:nvSpPr>
         <p:spPr>
           <a:xfrm>
-            <a:off x="6610429" y="4003618"/>
-            <a:ext cx="2105978" cy="229978"/>
+            <a:off x="7119441" y="4003618"/>
+            <a:ext cx="2268141" cy="229978"/>
           </a:xfrm>
           <a:prstGeom prst="rect">
             <a:avLst/>
@@ -2655,23 +2655,23 @@
     </p:spTree>
     <p:extLst>
       <p:ext uri="{BB962C8B-B14F-4D97-AF65-F5344CB8AC3E}">
-        <p14:creationId xmlns:p14="http://schemas.microsoft.com/office/powerpoint/2010/main" val="1369609630"/>
+        <p14:creationId xmlns:p14="http://schemas.microsoft.com/office/powerpoint/2010/main" val="1058767044"/>
       </p:ext>
     </p:extLst>
   </p:cSld>
   <p:clrMap bg1="lt1" tx1="dk1" bg2="lt2" tx2="dk2" accent1="accent1" accent2="accent2" accent3="accent3" accent4="accent4" accent5="accent5" accent6="accent6" hlink="hlink" folHlink="folHlink"/>
   <p:sldLayoutIdLst>
-    <p:sldLayoutId id="2147483661" r:id="rId1"/>
-    <p:sldLayoutId id="2147483662" r:id="rId2"/>
-    <p:sldLayoutId id="2147483663" r:id="rId3"/>
-    <p:sldLayoutId id="2147483664" r:id="rId4"/>
-    <p:sldLayoutId id="2147483665" r:id="rId5"/>
-    <p:sldLayoutId id="2147483666" r:id="rId6"/>
-    <p:sldLayoutId id="2147483667" r:id="rId7"/>
-    <p:sldLayoutId id="2147483668" r:id="rId8"/>
-    <p:sldLayoutId id="2147483669" r:id="rId9"/>
-    <p:sldLayoutId id="2147483670" r:id="rId10"/>
-    <p:sldLayoutId id="2147483671" r:id="rId11"/>
+    <p:sldLayoutId id="2147483673" r:id="rId1"/>
+    <p:sldLayoutId id="2147483674" r:id="rId2"/>
+    <p:sldLayoutId id="2147483675" r:id="rId3"/>
+    <p:sldLayoutId id="2147483676" r:id="rId4"/>
+    <p:sldLayoutId id="2147483677" r:id="rId5"/>
+    <p:sldLayoutId id="2147483678" r:id="rId6"/>
+    <p:sldLayoutId id="2147483679" r:id="rId7"/>
+    <p:sldLayoutId id="2147483680" r:id="rId8"/>
+    <p:sldLayoutId id="2147483681" r:id="rId9"/>
+    <p:sldLayoutId id="2147483682" r:id="rId10"/>
+    <p:sldLayoutId id="2147483683" r:id="rId11"/>
   </p:sldLayoutIdLst>
   <p:txStyles>
     <p:titleStyle>
@@ -2987,12 +2987,12 @@
         </p:nvSpPr>
         <p:spPr>
           <a:xfrm>
-            <a:off x="24857" y="75043"/>
+            <a:off x="272786" y="75043"/>
             <a:ext cx="8819904" cy="4169502"/>
           </a:xfrm>
           <a:prstGeom prst="roundRect">
             <a:avLst>
-              <a:gd name="adj" fmla="val 6141"/>
+              <a:gd name="adj" fmla="val 3883"/>
             </a:avLst>
           </a:prstGeom>
           <a:solidFill>
@@ -3026,12 +3026,12 @@
           <a:lstStyle/>
           <a:p>
             <a:pPr algn="ctr"/>
-            <a:endParaRPr lang="zh-CN" altLang="en-US"/>
+            <a:endParaRPr lang="zh-CN" altLang="en-US" sz="2400"/>
           </a:p>
         </p:txBody>
       </p:sp>
-      <mc:AlternateContent xmlns:mc="http://schemas.openxmlformats.org/markup-compatibility/2006" xmlns:a14="http://schemas.microsoft.com/office/drawing/2010/main">
-        <mc:Choice Requires="a14">
+      <mc:AlternateContent xmlns:mc="http://schemas.openxmlformats.org/markup-compatibility/2006">
+        <mc:Choice xmlns:a14="http://schemas.microsoft.com/office/drawing/2010/main" Requires="a14">
           <p:graphicFrame>
             <p:nvGraphicFramePr>
               <p:cNvPr id="7" name="表格 7">
@@ -3047,13 +3047,13 @@
               <p:nvPr>
                 <p:extLst>
                   <p:ext uri="{D42A27DB-BD31-4B8C-83A1-F6EECF244321}">
-                    <p14:modId xmlns:p14="http://schemas.microsoft.com/office/powerpoint/2010/main" val="369630032"/>
+                    <p14:modId xmlns:p14="http://schemas.microsoft.com/office/powerpoint/2010/main" val="591108307"/>
                   </p:ext>
                 </p:extLst>
               </p:nvPr>
             </p:nvGraphicFramePr>
             <p:xfrm>
-              <a:off x="150280" y="759292"/>
+              <a:off x="340025" y="796509"/>
               <a:ext cx="2461620" cy="370840"/>
             </p:xfrm>
             <a:graphic>
@@ -3641,7 +3641,7 @@
             </a:graphic>
           </p:graphicFrame>
         </mc:Choice>
-        <mc:Fallback xmlns="">
+        <mc:Fallback>
           <p:graphicFrame>
             <p:nvGraphicFramePr>
               <p:cNvPr id="7" name="表格 7">
@@ -3657,13 +3657,13 @@
               <p:nvPr>
                 <p:extLst>
                   <p:ext uri="{D42A27DB-BD31-4B8C-83A1-F6EECF244321}">
-                    <p14:modId xmlns:p14="http://schemas.microsoft.com/office/powerpoint/2010/main" val="369630032"/>
+                    <p14:modId xmlns:p14="http://schemas.microsoft.com/office/powerpoint/2010/main" val="591108307"/>
                   </p:ext>
                 </p:extLst>
               </p:nvPr>
             </p:nvGraphicFramePr>
             <p:xfrm>
-              <a:off x="150280" y="759292"/>
+              <a:off x="340025" y="796509"/>
               <a:ext cx="2461620" cy="370840"/>
             </p:xfrm>
             <a:graphic>
@@ -4027,8 +4027,8 @@
           </p:graphicFrame>
         </mc:Fallback>
       </mc:AlternateContent>
-      <mc:AlternateContent xmlns:mc="http://schemas.openxmlformats.org/markup-compatibility/2006" xmlns:a14="http://schemas.microsoft.com/office/drawing/2010/main">
-        <mc:Choice Requires="a14">
+      <mc:AlternateContent xmlns:mc="http://schemas.openxmlformats.org/markup-compatibility/2006">
+        <mc:Choice xmlns:a14="http://schemas.microsoft.com/office/drawing/2010/main" Requires="a14">
           <p:sp>
             <p:nvSpPr>
               <p:cNvPr id="9" name="文本框 8">
@@ -4043,8 +4043,8 @@
             </p:nvSpPr>
             <p:spPr>
               <a:xfrm>
-                <a:off x="775510" y="482294"/>
-                <a:ext cx="1211165" cy="276999"/>
+                <a:off x="782860" y="448108"/>
+                <a:ext cx="1761380" cy="338554"/>
               </a:xfrm>
               <a:prstGeom prst="rect">
                 <a:avLst/>
@@ -4058,7 +4058,7 @@
               <a:lstStyle/>
               <a:p>
                 <a:r>
-                  <a:rPr lang="zh-CN" altLang="en-US" sz="1200" dirty="0">
+                  <a:rPr lang="zh-CN" altLang="en-US" sz="1600" dirty="0">
                     <a:latin typeface="宋体" panose="02010600030101010101" pitchFamily="2" charset="-122"/>
                     <a:ea typeface="宋体" panose="02010600030101010101" pitchFamily="2" charset="-122"/>
                   </a:rPr>
@@ -4066,15 +4066,37 @@
                 </a:r>
                 <a14:m>
                   <m:oMath xmlns:m="http://schemas.openxmlformats.org/officeDocument/2006/math">
-                    <m:r>
-                      <a:rPr lang="en-US" altLang="zh-CN" sz="1200" i="1">
-                        <a:latin typeface="Cambria Math" panose="02040503050406030204" pitchFamily="18" charset="0"/>
-                      </a:rPr>
-                      <m:t>𝑋</m:t>
-                    </m:r>
+                    <m:sSub>
+                      <m:sSubPr>
+                        <m:ctrlPr>
+                          <a:rPr lang="en-US" altLang="zh-CN" sz="1600" i="1">
+                            <a:latin typeface="Cambria Math" panose="02040503050406030204" pitchFamily="18" charset="0"/>
+                            <a:ea typeface="宋体" panose="02010600030101010101" pitchFamily="2" charset="-122"/>
+                          </a:rPr>
+                        </m:ctrlPr>
+                      </m:sSubPr>
+                      <m:e>
+                        <m:r>
+                          <a:rPr lang="en-US" altLang="zh-CN" sz="1600" i="1">
+                            <a:latin typeface="Cambria Math" panose="02040503050406030204" pitchFamily="18" charset="0"/>
+                            <a:ea typeface="宋体" panose="02010600030101010101" pitchFamily="2" charset="-122"/>
+                          </a:rPr>
+                          <m:t>𝑋</m:t>
+                        </m:r>
+                      </m:e>
+                      <m:sub>
+                        <m:r>
+                          <a:rPr lang="en-US" altLang="zh-CN" sz="1600" i="1">
+                            <a:latin typeface="Cambria Math" panose="02040503050406030204" pitchFamily="18" charset="0"/>
+                            <a:ea typeface="宋体" panose="02010600030101010101" pitchFamily="2" charset="-122"/>
+                          </a:rPr>
+                          <m:t>𝑣𝑖𝑠</m:t>
+                        </m:r>
+                      </m:sub>
+                    </m:sSub>
                   </m:oMath>
                 </a14:m>
-                <a:endParaRPr lang="zh-CN" altLang="en-US" sz="1200" dirty="0">
+                <a:endParaRPr lang="zh-CN" altLang="en-US" sz="1600" dirty="0">
                   <a:latin typeface="宋体" panose="02010600030101010101" pitchFamily="2" charset="-122"/>
                   <a:ea typeface="宋体" panose="02010600030101010101" pitchFamily="2" charset="-122"/>
                 </a:endParaRPr>
@@ -4082,7 +4104,7 @@
             </p:txBody>
           </p:sp>
         </mc:Choice>
-        <mc:Fallback xmlns="">
+        <mc:Fallback>
           <p:sp>
             <p:nvSpPr>
               <p:cNvPr id="9" name="文本框 8">
@@ -4099,8 +4121,8 @@
             </p:nvSpPr>
             <p:spPr>
               <a:xfrm>
-                <a:off x="775510" y="482294"/>
-                <a:ext cx="1211165" cy="276999"/>
+                <a:off x="782860" y="448108"/>
+                <a:ext cx="1761380" cy="338554"/>
               </a:xfrm>
               <a:prstGeom prst="rect">
                 <a:avLst/>
@@ -4108,7 +4130,7 @@
               <a:blipFill>
                 <a:blip r:embed="rId3"/>
                 <a:stretch>
-                  <a:fillRect b="-15217"/>
+                  <a:fillRect l="-1730" t="-7273" b="-21818"/>
                 </a:stretch>
               </a:blipFill>
             </p:spPr>
@@ -4127,8 +4149,8 @@
           </p:sp>
         </mc:Fallback>
       </mc:AlternateContent>
-      <mc:AlternateContent xmlns:mc="http://schemas.openxmlformats.org/markup-compatibility/2006" xmlns:a14="http://schemas.microsoft.com/office/drawing/2010/main">
-        <mc:Choice Requires="a14">
+      <mc:AlternateContent xmlns:mc="http://schemas.openxmlformats.org/markup-compatibility/2006">
+        <mc:Choice xmlns:a14="http://schemas.microsoft.com/office/drawing/2010/main" Requires="a14">
           <p:graphicFrame>
             <p:nvGraphicFramePr>
               <p:cNvPr id="10" name="表格 7">
@@ -4144,13 +4166,13 @@
               <p:nvPr>
                 <p:extLst>
                   <p:ext uri="{D42A27DB-BD31-4B8C-83A1-F6EECF244321}">
-                    <p14:modId xmlns:p14="http://schemas.microsoft.com/office/powerpoint/2010/main" val="2933597146"/>
+                    <p14:modId xmlns:p14="http://schemas.microsoft.com/office/powerpoint/2010/main" val="3156285558"/>
                   </p:ext>
                 </p:extLst>
               </p:nvPr>
             </p:nvGraphicFramePr>
             <p:xfrm>
-              <a:off x="3747646" y="759292"/>
+              <a:off x="3722635" y="793200"/>
               <a:ext cx="2461620" cy="370840"/>
             </p:xfrm>
             <a:graphic>
@@ -4668,7 +4690,7 @@
             </a:graphic>
           </p:graphicFrame>
         </mc:Choice>
-        <mc:Fallback xmlns="">
+        <mc:Fallback>
           <p:graphicFrame>
             <p:nvGraphicFramePr>
               <p:cNvPr id="10" name="表格 7">
@@ -4684,13 +4706,13 @@
               <p:nvPr>
                 <p:extLst>
                   <p:ext uri="{D42A27DB-BD31-4B8C-83A1-F6EECF244321}">
-                    <p14:modId xmlns:p14="http://schemas.microsoft.com/office/powerpoint/2010/main" val="2933597146"/>
+                    <p14:modId xmlns:p14="http://schemas.microsoft.com/office/powerpoint/2010/main" val="3156285558"/>
                   </p:ext>
                 </p:extLst>
               </p:nvPr>
             </p:nvGraphicFramePr>
             <p:xfrm>
-              <a:off x="3747646" y="759292"/>
+              <a:off x="3722635" y="793200"/>
               <a:ext cx="2461620" cy="370840"/>
             </p:xfrm>
             <a:graphic>
@@ -4793,7 +4815,7 @@
                         <a:blipFill>
                           <a:blip r:embed="rId4"/>
                           <a:stretch>
-                            <a:fillRect l="-1235" t="-4839" r="-402469" b="-16129"/>
+                            <a:fillRect l="-1235" t="-4918" r="-402469" b="-16393"/>
                           </a:stretch>
                         </a:blipFill>
                       </a:tcPr>
@@ -4925,7 +4947,7 @@
                         <a:blipFill>
                           <a:blip r:embed="rId4"/>
                           <a:stretch>
-                            <a:fillRect l="-201235" t="-4839" r="-202469" b="-16129"/>
+                            <a:fillRect l="-201235" t="-4918" r="-202469" b="-16393"/>
                           </a:stretch>
                         </a:blipFill>
                       </a:tcPr>
@@ -5057,7 +5079,7 @@
                         <a:blipFill>
                           <a:blip r:embed="rId4"/>
                           <a:stretch>
-                            <a:fillRect l="-401235" t="-4839" r="-2469" b="-16129"/>
+                            <a:fillRect l="-401235" t="-4918" r="-2469" b="-16393"/>
                           </a:stretch>
                         </a:blipFill>
                       </a:tcPr>
@@ -5085,13 +5107,15 @@
           </p:cNvPr>
           <p:cNvCxnSpPr>
             <a:cxnSpLocks/>
+            <a:stCxn id="7" idx="3"/>
+            <a:endCxn id="10" idx="1"/>
           </p:cNvCxnSpPr>
           <p:nvPr/>
         </p:nvCxnSpPr>
         <p:spPr>
-          <a:xfrm>
-            <a:off x="2611900" y="965830"/>
-            <a:ext cx="1135746" cy="0"/>
+          <a:xfrm flipV="1">
+            <a:off x="2801645" y="978621"/>
+            <a:ext cx="920990" cy="3309"/>
           </a:xfrm>
           <a:prstGeom prst="straightConnector1">
             <a:avLst/>
@@ -5129,8 +5153,8 @@
         </p:nvSpPr>
         <p:spPr>
           <a:xfrm>
-            <a:off x="2779181" y="702671"/>
-            <a:ext cx="800219" cy="276999"/>
+            <a:off x="2748486" y="665122"/>
+            <a:ext cx="1005403" cy="338554"/>
           </a:xfrm>
           <a:prstGeom prst="rect">
             <a:avLst/>
@@ -5144,7 +5168,7 @@
           <a:lstStyle/>
           <a:p>
             <a:r>
-              <a:rPr lang="zh-CN" altLang="en-US" sz="1200" dirty="0">
+              <a:rPr lang="zh-CN" altLang="en-US" sz="1600" dirty="0">
                 <a:latin typeface="宋体" panose="02010600030101010101" pitchFamily="2" charset="-122"/>
                 <a:ea typeface="宋体" panose="02010600030101010101" pitchFamily="2" charset="-122"/>
               </a:rPr>
@@ -5167,8 +5191,8 @@
         </p:nvSpPr>
         <p:spPr>
           <a:xfrm>
-            <a:off x="4371905" y="482294"/>
-            <a:ext cx="1261884" cy="276999"/>
+            <a:off x="4145616" y="448108"/>
+            <a:ext cx="1620957" cy="338554"/>
           </a:xfrm>
           <a:prstGeom prst="rect">
             <a:avLst/>
@@ -5182,7 +5206,7 @@
           <a:lstStyle/>
           <a:p>
             <a:r>
-              <a:rPr lang="zh-CN" altLang="en-US" sz="1200" dirty="0">
+              <a:rPr lang="zh-CN" altLang="en-US" sz="1600" dirty="0">
                 <a:latin typeface="宋体" panose="02010600030101010101" pitchFamily="2" charset="-122"/>
                 <a:ea typeface="宋体" panose="02010600030101010101" pitchFamily="2" charset="-122"/>
               </a:rPr>
@@ -5205,7 +5229,7 @@
         </p:nvSpPr>
         <p:spPr>
           <a:xfrm>
-            <a:off x="7197563" y="223883"/>
+            <a:off x="7736929" y="261099"/>
             <a:ext cx="1173708" cy="1153236"/>
           </a:xfrm>
           <a:prstGeom prst="roundRect">
@@ -5243,7 +5267,7 @@
           <a:lstStyle/>
           <a:p>
             <a:pPr algn="ctr"/>
-            <a:endParaRPr lang="zh-CN" altLang="en-US"/>
+            <a:endParaRPr lang="zh-CN" altLang="en-US" sz="2400"/>
           </a:p>
         </p:txBody>
       </p:sp>
@@ -5261,7 +5285,7 @@
         </p:nvSpPr>
         <p:spPr>
           <a:xfrm>
-            <a:off x="7161519" y="265940"/>
+            <a:off x="7700885" y="303157"/>
             <a:ext cx="1173708" cy="1153236"/>
           </a:xfrm>
           <a:prstGeom prst="roundRect">
@@ -5299,7 +5323,7 @@
           <a:lstStyle/>
           <a:p>
             <a:pPr algn="ctr"/>
-            <a:endParaRPr lang="zh-CN" altLang="en-US"/>
+            <a:endParaRPr lang="zh-CN" altLang="en-US" sz="2400"/>
           </a:p>
         </p:txBody>
       </p:sp>
@@ -5317,7 +5341,7 @@
         </p:nvSpPr>
         <p:spPr>
           <a:xfrm>
-            <a:off x="7129676" y="307997"/>
+            <a:off x="7669042" y="345213"/>
             <a:ext cx="1173708" cy="1153236"/>
           </a:xfrm>
           <a:prstGeom prst="roundRect">
@@ -5355,7 +5379,7 @@
           <a:lstStyle/>
           <a:p>
             <a:pPr algn="ctr"/>
-            <a:endParaRPr lang="zh-CN" altLang="en-US"/>
+            <a:endParaRPr lang="zh-CN" altLang="en-US" sz="2400"/>
           </a:p>
         </p:txBody>
       </p:sp>
@@ -5373,7 +5397,7 @@
         </p:nvSpPr>
         <p:spPr>
           <a:xfrm>
-            <a:off x="7079984" y="350054"/>
+            <a:off x="7619350" y="387272"/>
             <a:ext cx="1372520" cy="1442051"/>
           </a:xfrm>
           <a:prstGeom prst="roundRect">
@@ -5411,7 +5435,7 @@
           <a:lstStyle/>
           <a:p>
             <a:pPr algn="ctr"/>
-            <a:endParaRPr lang="zh-CN" altLang="en-US"/>
+            <a:endParaRPr lang="zh-CN" altLang="en-US" sz="2400"/>
           </a:p>
         </p:txBody>
       </p:sp>
@@ -5429,8 +5453,8 @@
         </p:nvSpPr>
         <p:spPr>
           <a:xfrm>
-            <a:off x="7250720" y="422952"/>
-            <a:ext cx="1031051" cy="461665"/>
+            <a:off x="7640205" y="460169"/>
+            <a:ext cx="1330814" cy="584775"/>
           </a:xfrm>
           <a:prstGeom prst="rect">
             <a:avLst/>
@@ -5445,7 +5469,7 @@
           <a:p>
             <a:pPr algn="ctr"/>
             <a:r>
-              <a:rPr lang="en-US" altLang="zh-CN" sz="1200" b="1" dirty="0">
+              <a:rPr lang="en-US" altLang="zh-CN" sz="1600" b="1" dirty="0">
                 <a:latin typeface="宋体" panose="02010600030101010101" pitchFamily="2" charset="-122"/>
                 <a:ea typeface="宋体" panose="02010600030101010101" pitchFamily="2" charset="-122"/>
               </a:rPr>
@@ -5455,21 +5479,21 @@
           <a:p>
             <a:pPr algn="ctr"/>
             <a:r>
-              <a:rPr lang="en-US" altLang="zh-CN" sz="1200" b="1" dirty="0">
+              <a:rPr lang="en-US" altLang="zh-CN" sz="1600" b="1" dirty="0">
                 <a:latin typeface="宋体" panose="02010600030101010101" pitchFamily="2" charset="-122"/>
                 <a:ea typeface="宋体" panose="02010600030101010101" pitchFamily="2" charset="-122"/>
               </a:rPr>
               <a:t>Encoder</a:t>
             </a:r>
-            <a:endParaRPr lang="zh-CN" altLang="en-US" sz="1200" b="1" dirty="0">
+            <a:endParaRPr lang="zh-CN" altLang="en-US" sz="1600" b="1" dirty="0">
               <a:latin typeface="宋体" panose="02010600030101010101" pitchFamily="2" charset="-122"/>
               <a:ea typeface="宋体" panose="02010600030101010101" pitchFamily="2" charset="-122"/>
             </a:endParaRPr>
           </a:p>
         </p:txBody>
       </p:sp>
-      <mc:AlternateContent xmlns:mc="http://schemas.openxmlformats.org/markup-compatibility/2006" xmlns:a14="http://schemas.microsoft.com/office/drawing/2010/main">
-        <mc:Choice Requires="a14">
+      <mc:AlternateContent xmlns:mc="http://schemas.openxmlformats.org/markup-compatibility/2006">
+        <mc:Choice xmlns:a14="http://schemas.microsoft.com/office/drawing/2010/main" Requires="a14">
           <p:sp>
             <p:nvSpPr>
               <p:cNvPr id="24" name="文本框 23">
@@ -5484,8 +5508,8 @@
             </p:nvSpPr>
             <p:spPr>
               <a:xfrm>
-                <a:off x="7317922" y="1098315"/>
-                <a:ext cx="985462" cy="461665"/>
+                <a:off x="7723759" y="1135533"/>
+                <a:ext cx="1252522" cy="584775"/>
               </a:xfrm>
               <a:prstGeom prst="rect">
                 <a:avLst/>
@@ -5506,21 +5530,21 @@
                     </m:oMathParaPr>
                     <m:oMath xmlns:m="http://schemas.openxmlformats.org/officeDocument/2006/math">
                       <m:r>
-                        <a:rPr lang="en-US" altLang="zh-CN" sz="1200" i="1">
+                        <a:rPr lang="en-US" altLang="zh-CN" sz="1600" i="1">
                           <a:latin typeface="Cambria Math" panose="02040503050406030204" pitchFamily="18" charset="0"/>
                           <a:ea typeface="宋体" panose="02010600030101010101" pitchFamily="2" charset="-122"/>
                         </a:rPr>
                         <m:t>𝐿</m:t>
                       </m:r>
                       <m:r>
-                        <a:rPr lang="en-US" altLang="zh-CN" sz="1200" i="1">
+                        <a:rPr lang="en-US" altLang="zh-CN" sz="1600" i="1">
                           <a:latin typeface="Cambria Math" panose="02040503050406030204" pitchFamily="18" charset="0"/>
                           <a:ea typeface="Cambria Math" panose="02040503050406030204" pitchFamily="18" charset="0"/>
                         </a:rPr>
                         <m:t>×</m:t>
                       </m:r>
                       <m:r>
-                        <a:rPr lang="en-US" altLang="zh-CN" sz="1200" i="1">
+                        <a:rPr lang="en-US" altLang="zh-CN" sz="1600" i="1">
                           <a:latin typeface="Cambria Math" panose="02040503050406030204" pitchFamily="18" charset="0"/>
                           <a:ea typeface="Cambria Math" panose="02040503050406030204" pitchFamily="18" charset="0"/>
                         </a:rPr>
@@ -5529,7 +5553,7 @@
                     </m:oMath>
                   </m:oMathPara>
                 </a14:m>
-                <a:endParaRPr lang="en-US" altLang="zh-CN" sz="1200" dirty="0">
+                <a:endParaRPr lang="en-US" altLang="zh-CN" sz="1600" dirty="0">
                   <a:latin typeface="宋体" panose="02010600030101010101" pitchFamily="2" charset="-122"/>
                   <a:ea typeface="Cambria Math" panose="02040503050406030204" pitchFamily="18" charset="0"/>
                 </a:endParaRPr>
@@ -5537,13 +5561,13 @@
               <a:p>
                 <a:pPr algn="ctr"/>
                 <a:r>
-                  <a:rPr lang="en-US" altLang="zh-CN" sz="1200" dirty="0">
+                  <a:rPr lang="en-US" altLang="zh-CN" sz="1600" dirty="0">
                     <a:latin typeface="宋体" panose="02010600030101010101" pitchFamily="2" charset="-122"/>
                     <a:ea typeface="宋体" panose="02010600030101010101" pitchFamily="2" charset="-122"/>
                   </a:rPr>
                   <a:t>(MHA+FFN)</a:t>
                 </a:r>
-                <a:endParaRPr lang="zh-CN" altLang="en-US" sz="1200" dirty="0">
+                <a:endParaRPr lang="zh-CN" altLang="en-US" sz="1600" dirty="0">
                   <a:latin typeface="宋体" panose="02010600030101010101" pitchFamily="2" charset="-122"/>
                   <a:ea typeface="宋体" panose="02010600030101010101" pitchFamily="2" charset="-122"/>
                 </a:endParaRPr>
@@ -5551,7 +5575,7 @@
             </p:txBody>
           </p:sp>
         </mc:Choice>
-        <mc:Fallback xmlns="">
+        <mc:Fallback>
           <p:sp>
             <p:nvSpPr>
               <p:cNvPr id="24" name="文本框 23">
@@ -5568,8 +5592,8 @@
             </p:nvSpPr>
             <p:spPr>
               <a:xfrm>
-                <a:off x="7317922" y="1098315"/>
-                <a:ext cx="985462" cy="461665"/>
+                <a:off x="7723759" y="1135533"/>
+                <a:ext cx="1252522" cy="584775"/>
               </a:xfrm>
               <a:prstGeom prst="rect">
                 <a:avLst/>
@@ -5577,7 +5601,7 @@
               <a:blipFill>
                 <a:blip r:embed="rId5"/>
                 <a:stretch>
-                  <a:fillRect b="-10526"/>
+                  <a:fillRect b="-12500"/>
                 </a:stretch>
               </a:blipFill>
             </p:spPr>
@@ -5607,13 +5631,14 @@
           </p:cNvPr>
           <p:cNvCxnSpPr>
             <a:cxnSpLocks/>
+            <a:stCxn id="10" idx="3"/>
           </p:cNvCxnSpPr>
           <p:nvPr/>
         </p:nvCxnSpPr>
         <p:spPr>
-          <a:xfrm>
-            <a:off x="6209267" y="941454"/>
-            <a:ext cx="870719" cy="0"/>
+          <a:xfrm flipV="1">
+            <a:off x="6184256" y="978620"/>
+            <a:ext cx="1424107" cy="1"/>
           </a:xfrm>
           <a:prstGeom prst="straightConnector1">
             <a:avLst/>
@@ -5637,44 +5662,128 @@
           </a:fontRef>
         </p:style>
       </p:cxnSp>
-      <p:sp>
-        <p:nvSpPr>
-          <p:cNvPr id="28" name="文本框 27">
-            <a:extLst>
-              <a:ext uri="{FF2B5EF4-FFF2-40B4-BE49-F238E27FC236}">
-                <a16:creationId xmlns:a16="http://schemas.microsoft.com/office/drawing/2014/main" id="{49C07E15-DDA2-4DB6-9214-1CAAF2A7CCB7}"/>
-              </a:ext>
-            </a:extLst>
-          </p:cNvPr>
-          <p:cNvSpPr txBox="1"/>
-          <p:nvPr/>
-        </p:nvSpPr>
-        <p:spPr>
-          <a:xfrm>
-            <a:off x="6146351" y="641521"/>
-            <a:ext cx="954107" cy="276999"/>
-          </a:xfrm>
-          <a:prstGeom prst="rect">
-            <a:avLst/>
-          </a:prstGeom>
-          <a:noFill/>
-        </p:spPr>
-        <p:txBody>
-          <a:bodyPr wrap="none" rtlCol="0">
-            <a:spAutoFit/>
-          </a:bodyPr>
-          <a:lstStyle/>
-          <a:p>
-            <a:r>
-              <a:rPr lang="zh-CN" altLang="en-US" sz="1200" dirty="0">
-                <a:latin typeface="宋体" panose="02010600030101010101" pitchFamily="2" charset="-122"/>
-                <a:ea typeface="宋体" panose="02010600030101010101" pitchFamily="2" charset="-122"/>
-              </a:rPr>
-              <a:t>仅可见片段</a:t>
-            </a:r>
-          </a:p>
-        </p:txBody>
-      </p:sp>
+      <mc:AlternateContent xmlns:mc="http://schemas.openxmlformats.org/markup-compatibility/2006">
+        <mc:Choice xmlns:a14="http://schemas.microsoft.com/office/drawing/2010/main" Requires="a14">
+          <p:sp>
+            <p:nvSpPr>
+              <p:cNvPr id="28" name="文本框 27">
+                <a:extLst>
+                  <a:ext uri="{FF2B5EF4-FFF2-40B4-BE49-F238E27FC236}">
+                    <a16:creationId xmlns:a16="http://schemas.microsoft.com/office/drawing/2014/main" id="{49C07E15-DDA2-4DB6-9214-1CAAF2A7CCB7}"/>
+                  </a:ext>
+                </a:extLst>
+              </p:cNvPr>
+              <p:cNvSpPr txBox="1"/>
+              <p:nvPr/>
+            </p:nvSpPr>
+            <p:spPr>
+              <a:xfrm>
+                <a:off x="6130261" y="615778"/>
+                <a:ext cx="1585819" cy="348813"/>
+              </a:xfrm>
+              <a:prstGeom prst="rect">
+                <a:avLst/>
+              </a:prstGeom>
+              <a:noFill/>
+            </p:spPr>
+            <p:txBody>
+              <a:bodyPr wrap="none" rtlCol="0">
+                <a:spAutoFit/>
+              </a:bodyPr>
+              <a:lstStyle/>
+              <a:p>
+                <a:r>
+                  <a:rPr lang="zh-CN" altLang="en-US" sz="1600" dirty="0">
+                    <a:latin typeface="宋体" panose="02010600030101010101" pitchFamily="2" charset="-122"/>
+                    <a:ea typeface="宋体" panose="02010600030101010101" pitchFamily="2" charset="-122"/>
+                  </a:rPr>
+                  <a:t>仅可见片段</a:t>
+                </a:r>
+                <a14:m>
+                  <m:oMath xmlns:m="http://schemas.openxmlformats.org/officeDocument/2006/math">
+                    <m:sSup>
+                      <m:sSupPr>
+                        <m:ctrlPr>
+                          <a:rPr lang="en-US" altLang="zh-CN" sz="1600" i="1">
+                            <a:latin typeface="Cambria Math" panose="02040503050406030204" pitchFamily="18" charset="0"/>
+                            <a:ea typeface="宋体" panose="02010600030101010101" pitchFamily="2" charset="-122"/>
+                          </a:rPr>
+                        </m:ctrlPr>
+                      </m:sSupPr>
+                      <m:e>
+                        <m:r>
+                          <a:rPr lang="en-US" altLang="zh-CN" sz="1600" i="1">
+                            <a:latin typeface="Cambria Math" panose="02040503050406030204" pitchFamily="18" charset="0"/>
+                            <a:ea typeface="宋体" panose="02010600030101010101" pitchFamily="2" charset="-122"/>
+                          </a:rPr>
+                          <m:t>𝐻</m:t>
+                        </m:r>
+                      </m:e>
+                      <m:sup>
+                        <m:r>
+                          <a:rPr lang="en-US" altLang="zh-CN" sz="1600" i="1">
+                            <a:latin typeface="Cambria Math" panose="02040503050406030204" pitchFamily="18" charset="0"/>
+                            <a:ea typeface="宋体" panose="02010600030101010101" pitchFamily="2" charset="-122"/>
+                          </a:rPr>
+                          <m:t>(0)</m:t>
+                        </m:r>
+                      </m:sup>
+                    </m:sSup>
+                  </m:oMath>
+                </a14:m>
+                <a:endParaRPr lang="zh-CN" altLang="en-US" sz="1600" dirty="0">
+                  <a:latin typeface="宋体" panose="02010600030101010101" pitchFamily="2" charset="-122"/>
+                  <a:ea typeface="宋体" panose="02010600030101010101" pitchFamily="2" charset="-122"/>
+                </a:endParaRPr>
+              </a:p>
+            </p:txBody>
+          </p:sp>
+        </mc:Choice>
+        <mc:Fallback>
+          <p:sp>
+            <p:nvSpPr>
+              <p:cNvPr id="28" name="文本框 27">
+                <a:extLst>
+                  <a:ext uri="{FF2B5EF4-FFF2-40B4-BE49-F238E27FC236}">
+                    <a16:creationId xmlns:a16="http://schemas.microsoft.com/office/drawing/2014/main" id="{49C07E15-DDA2-4DB6-9214-1CAAF2A7CCB7}"/>
+                  </a:ext>
+                </a:extLst>
+              </p:cNvPr>
+              <p:cNvSpPr txBox="1">
+                <a:spLocks noRot="1" noChangeAspect="1" noMove="1" noResize="1" noEditPoints="1" noAdjustHandles="1" noChangeArrowheads="1" noChangeShapeType="1" noTextEdit="1"/>
+              </p:cNvSpPr>
+              <p:nvPr/>
+            </p:nvSpPr>
+            <p:spPr>
+              <a:xfrm>
+                <a:off x="6130261" y="615778"/>
+                <a:ext cx="1585819" cy="348813"/>
+              </a:xfrm>
+              <a:prstGeom prst="rect">
+                <a:avLst/>
+              </a:prstGeom>
+              <a:blipFill>
+                <a:blip r:embed="rId6"/>
+                <a:stretch>
+                  <a:fillRect l="-2308" t="-5263" b="-19298"/>
+                </a:stretch>
+              </a:blipFill>
+            </p:spPr>
+            <p:txBody>
+              <a:bodyPr/>
+              <a:lstStyle/>
+              <a:p>
+                <a:r>
+                  <a:rPr lang="zh-CN" altLang="en-US">
+                    <a:noFill/>
+                  </a:rPr>
+                  <a:t> </a:t>
+                </a:r>
+              </a:p>
+            </p:txBody>
+          </p:sp>
+        </mc:Fallback>
+      </mc:AlternateContent>
       <p:sp>
         <p:nvSpPr>
           <p:cNvPr id="34" name="矩形: 圆角 33">
@@ -5689,7 +5798,7 @@
         </p:nvSpPr>
         <p:spPr>
           <a:xfrm>
-            <a:off x="7228359" y="2893488"/>
+            <a:off x="7767727" y="2930704"/>
             <a:ext cx="1100843" cy="769398"/>
           </a:xfrm>
           <a:prstGeom prst="roundRect">
@@ -5727,7 +5836,7 @@
           <a:lstStyle/>
           <a:p>
             <a:pPr algn="ctr"/>
-            <a:endParaRPr lang="zh-CN" altLang="en-US"/>
+            <a:endParaRPr lang="zh-CN" altLang="en-US" sz="2400"/>
           </a:p>
         </p:txBody>
       </p:sp>
@@ -5745,7 +5854,7 @@
         </p:nvSpPr>
         <p:spPr>
           <a:xfrm>
-            <a:off x="7194552" y="2921547"/>
+            <a:off x="7733920" y="2958763"/>
             <a:ext cx="1100843" cy="769398"/>
           </a:xfrm>
           <a:prstGeom prst="roundRect">
@@ -5783,7 +5892,7 @@
           <a:lstStyle/>
           <a:p>
             <a:pPr algn="ctr"/>
-            <a:endParaRPr lang="zh-CN" altLang="en-US"/>
+            <a:endParaRPr lang="zh-CN" altLang="en-US" sz="2400"/>
           </a:p>
         </p:txBody>
       </p:sp>
@@ -5801,7 +5910,7 @@
         </p:nvSpPr>
         <p:spPr>
           <a:xfrm>
-            <a:off x="7164686" y="2949606"/>
+            <a:off x="7704054" y="2986823"/>
             <a:ext cx="1100843" cy="769398"/>
           </a:xfrm>
           <a:prstGeom prst="roundRect">
@@ -5839,7 +5948,7 @@
           <a:lstStyle/>
           <a:p>
             <a:pPr algn="ctr"/>
-            <a:endParaRPr lang="zh-CN" altLang="en-US"/>
+            <a:endParaRPr lang="zh-CN" altLang="en-US" sz="2400"/>
           </a:p>
         </p:txBody>
       </p:sp>
@@ -5857,7 +5966,7 @@
         </p:nvSpPr>
         <p:spPr>
           <a:xfrm>
-            <a:off x="7118079" y="2977665"/>
+            <a:off x="7657446" y="3014883"/>
             <a:ext cx="1287312" cy="962085"/>
           </a:xfrm>
           <a:prstGeom prst="roundRect">
@@ -5895,7 +6004,7 @@
           <a:lstStyle/>
           <a:p>
             <a:pPr algn="ctr"/>
-            <a:endParaRPr lang="zh-CN" altLang="en-US"/>
+            <a:endParaRPr lang="zh-CN" altLang="en-US" sz="2400"/>
           </a:p>
         </p:txBody>
       </p:sp>
@@ -5913,8 +6022,8 @@
         </p:nvSpPr>
         <p:spPr>
           <a:xfrm>
-            <a:off x="7417085" y="3128599"/>
-            <a:ext cx="723275" cy="276999"/>
+            <a:off x="7861074" y="3165814"/>
+            <a:ext cx="914033" cy="338554"/>
           </a:xfrm>
           <a:prstGeom prst="rect">
             <a:avLst/>
@@ -5931,21 +6040,21 @@
           <a:p>
             <a:pPr algn="ctr"/>
             <a:r>
-              <a:rPr lang="en-US" altLang="zh-CN" sz="1200" b="1" dirty="0">
+              <a:rPr lang="en-US" altLang="zh-CN" sz="1600" b="1" dirty="0">
                 <a:latin typeface="宋体" panose="02010600030101010101" pitchFamily="2" charset="-122"/>
                 <a:ea typeface="宋体" panose="02010600030101010101" pitchFamily="2" charset="-122"/>
               </a:rPr>
               <a:t>Decoder</a:t>
             </a:r>
-            <a:endParaRPr lang="zh-CN" altLang="en-US" sz="1200" b="1" dirty="0">
+            <a:endParaRPr lang="zh-CN" altLang="en-US" sz="1600" b="1" dirty="0">
               <a:latin typeface="宋体" panose="02010600030101010101" pitchFamily="2" charset="-122"/>
               <a:ea typeface="宋体" panose="02010600030101010101" pitchFamily="2" charset="-122"/>
             </a:endParaRPr>
           </a:p>
         </p:txBody>
       </p:sp>
-      <mc:AlternateContent xmlns:mc="http://schemas.openxmlformats.org/markup-compatibility/2006" xmlns:a14="http://schemas.microsoft.com/office/drawing/2010/main">
-        <mc:Choice Requires="a14">
+      <mc:AlternateContent xmlns:mc="http://schemas.openxmlformats.org/markup-compatibility/2006">
+        <mc:Choice xmlns:a14="http://schemas.microsoft.com/office/drawing/2010/main" Requires="a14">
           <p:sp>
             <p:nvSpPr>
               <p:cNvPr id="33" name="文本框 32">
@@ -5960,8 +6069,8 @@
             </p:nvSpPr>
             <p:spPr>
               <a:xfrm>
-                <a:off x="7261882" y="3455829"/>
-                <a:ext cx="1035796" cy="276999"/>
+                <a:off x="7659640" y="3493045"/>
+                <a:ext cx="1256240" cy="338554"/>
               </a:xfrm>
               <a:prstGeom prst="rect">
                 <a:avLst/>
@@ -5971,7 +6080,7 @@
               </a:solidFill>
             </p:spPr>
             <p:txBody>
-              <a:bodyPr wrap="none" rtlCol="0">
+              <a:bodyPr wrap="square" rtlCol="0">
                 <a:spAutoFit/>
               </a:bodyPr>
               <a:lstStyle/>
@@ -5984,21 +6093,21 @@
                     </m:oMathParaPr>
                     <m:oMath xmlns:m="http://schemas.openxmlformats.org/officeDocument/2006/math">
                       <m:r>
-                        <a:rPr lang="en-US" altLang="zh-CN" sz="1200" i="1">
+                        <a:rPr lang="en-US" altLang="zh-CN" sz="1600" i="1">
                           <a:latin typeface="Cambria Math" panose="02040503050406030204" pitchFamily="18" charset="0"/>
                           <a:ea typeface="宋体" panose="02010600030101010101" pitchFamily="2" charset="-122"/>
                         </a:rPr>
                         <m:t>𝑀</m:t>
                       </m:r>
                       <m:r>
-                        <a:rPr lang="en-US" altLang="zh-CN" sz="1200" i="1">
+                        <a:rPr lang="en-US" altLang="zh-CN" sz="1600" i="1">
                           <a:latin typeface="Cambria Math" panose="02040503050406030204" pitchFamily="18" charset="0"/>
                           <a:ea typeface="Cambria Math" panose="02040503050406030204" pitchFamily="18" charset="0"/>
                         </a:rPr>
                         <m:t>×</m:t>
                       </m:r>
                       <m:r>
-                        <a:rPr lang="en-US" altLang="zh-CN" sz="1200" i="1">
+                        <a:rPr lang="en-US" altLang="zh-CN" sz="1600" i="1">
                           <a:latin typeface="Cambria Math" panose="02040503050406030204" pitchFamily="18" charset="0"/>
                           <a:ea typeface="Cambria Math" panose="02040503050406030204" pitchFamily="18" charset="0"/>
                         </a:rPr>
@@ -6007,7 +6116,7 @@
                     </m:oMath>
                   </m:oMathPara>
                 </a14:m>
-                <a:endParaRPr lang="en-US" altLang="zh-CN" sz="1200" dirty="0">
+                <a:endParaRPr lang="en-US" altLang="zh-CN" sz="1600" dirty="0">
                   <a:latin typeface="宋体" panose="02010600030101010101" pitchFamily="2" charset="-122"/>
                   <a:ea typeface="Cambria Math" panose="02040503050406030204" pitchFamily="18" charset="0"/>
                 </a:endParaRPr>
@@ -6015,7 +6124,7 @@
             </p:txBody>
           </p:sp>
         </mc:Choice>
-        <mc:Fallback xmlns="">
+        <mc:Fallback>
           <p:sp>
             <p:nvSpPr>
               <p:cNvPr id="33" name="文本框 32">
@@ -6032,16 +6141,16 @@
             </p:nvSpPr>
             <p:spPr>
               <a:xfrm>
-                <a:off x="7261882" y="3455829"/>
-                <a:ext cx="1035796" cy="276999"/>
+                <a:off x="7659640" y="3493045"/>
+                <a:ext cx="1256240" cy="338554"/>
               </a:xfrm>
               <a:prstGeom prst="rect">
                 <a:avLst/>
               </a:prstGeom>
               <a:blipFill>
-                <a:blip r:embed="rId6"/>
+                <a:blip r:embed="rId7"/>
                 <a:stretch>
-                  <a:fillRect/>
+                  <a:fillRect l="-485"/>
                 </a:stretch>
               </a:blipFill>
             </p:spPr>
@@ -6078,7 +6187,7 @@
         </p:nvCxnSpPr>
         <p:spPr>
           <a:xfrm>
-            <a:off x="7766244" y="1792110"/>
+            <a:off x="8305611" y="1829328"/>
             <a:ext cx="12536" cy="1101381"/>
           </a:xfrm>
           <a:prstGeom prst="straightConnector1">
@@ -6117,8 +6226,8 @@
         </p:nvSpPr>
         <p:spPr>
           <a:xfrm>
-            <a:off x="7721490" y="2060349"/>
-            <a:ext cx="1184940" cy="461665"/>
+            <a:off x="8260856" y="2097566"/>
+            <a:ext cx="1518364" cy="584775"/>
           </a:xfrm>
           <a:prstGeom prst="rect">
             <a:avLst/>
@@ -6132,41 +6241,41 @@
           <a:lstStyle/>
           <a:p>
             <a:r>
-              <a:rPr lang="en-US" altLang="zh-CN" sz="1200" dirty="0">
+              <a:rPr lang="en-US" altLang="zh-CN" sz="1600" dirty="0">
                 <a:latin typeface="宋体" panose="02010600030101010101" pitchFamily="2" charset="-122"/>
                 <a:ea typeface="宋体" panose="02010600030101010101" pitchFamily="2" charset="-122"/>
               </a:rPr>
               <a:t>+</a:t>
             </a:r>
             <a:r>
-              <a:rPr lang="zh-CN" altLang="en-US" sz="1200" dirty="0">
+              <a:rPr lang="zh-CN" altLang="en-US" sz="1600" dirty="0">
                 <a:latin typeface="宋体" panose="02010600030101010101" pitchFamily="2" charset="-122"/>
                 <a:ea typeface="宋体" panose="02010600030101010101" pitchFamily="2" charset="-122"/>
               </a:rPr>
               <a:t>掩码标记</a:t>
             </a:r>
-            <a:endParaRPr lang="en-US" altLang="zh-CN" sz="1200" dirty="0">
+            <a:endParaRPr lang="en-US" altLang="zh-CN" sz="1600" dirty="0">
               <a:latin typeface="宋体" panose="02010600030101010101" pitchFamily="2" charset="-122"/>
               <a:ea typeface="宋体" panose="02010600030101010101" pitchFamily="2" charset="-122"/>
             </a:endParaRPr>
           </a:p>
           <a:p>
             <a:r>
-              <a:rPr lang="en-US" altLang="zh-CN" sz="1200" dirty="0">
+              <a:rPr lang="en-US" altLang="zh-CN" sz="1600" dirty="0">
                 <a:latin typeface="宋体" panose="02010600030101010101" pitchFamily="2" charset="-122"/>
                 <a:ea typeface="宋体" panose="02010600030101010101" pitchFamily="2" charset="-122"/>
               </a:rPr>
               <a:t>(Mask Tokens)</a:t>
             </a:r>
-            <a:endParaRPr lang="zh-CN" altLang="en-US" sz="1200" dirty="0">
+            <a:endParaRPr lang="zh-CN" altLang="en-US" sz="1600" dirty="0">
               <a:latin typeface="宋体" panose="02010600030101010101" pitchFamily="2" charset="-122"/>
               <a:ea typeface="宋体" panose="02010600030101010101" pitchFamily="2" charset="-122"/>
             </a:endParaRPr>
           </a:p>
         </p:txBody>
       </p:sp>
-      <mc:AlternateContent xmlns:mc="http://schemas.openxmlformats.org/markup-compatibility/2006" xmlns:a14="http://schemas.microsoft.com/office/drawing/2010/main">
-        <mc:Choice Requires="a14">
+      <mc:AlternateContent xmlns:mc="http://schemas.openxmlformats.org/markup-compatibility/2006">
+        <mc:Choice xmlns:a14="http://schemas.microsoft.com/office/drawing/2010/main" Requires="a14">
           <p:graphicFrame>
             <p:nvGraphicFramePr>
               <p:cNvPr id="43" name="表格 7">
@@ -6182,13 +6291,13 @@
               <p:nvPr>
                 <p:extLst>
                   <p:ext uri="{D42A27DB-BD31-4B8C-83A1-F6EECF244321}">
-                    <p14:modId xmlns:p14="http://schemas.microsoft.com/office/powerpoint/2010/main" val="3914194367"/>
+                    <p14:modId xmlns:p14="http://schemas.microsoft.com/office/powerpoint/2010/main" val="4151421568"/>
                   </p:ext>
                 </p:extLst>
               </p:nvPr>
             </p:nvGraphicFramePr>
             <p:xfrm>
-              <a:off x="3747646" y="3271495"/>
+              <a:off x="3937391" y="3308712"/>
               <a:ext cx="2461620" cy="370840"/>
             </p:xfrm>
             <a:graphic>
@@ -6851,7 +6960,7 @@
             </a:graphic>
           </p:graphicFrame>
         </mc:Choice>
-        <mc:Fallback xmlns="">
+        <mc:Fallback>
           <p:graphicFrame>
             <p:nvGraphicFramePr>
               <p:cNvPr id="43" name="表格 7">
@@ -6867,13 +6976,13 @@
               <p:nvPr>
                 <p:extLst>
                   <p:ext uri="{D42A27DB-BD31-4B8C-83A1-F6EECF244321}">
-                    <p14:modId xmlns:p14="http://schemas.microsoft.com/office/powerpoint/2010/main" val="3914194367"/>
+                    <p14:modId xmlns:p14="http://schemas.microsoft.com/office/powerpoint/2010/main" val="4151421568"/>
                   </p:ext>
                 </p:extLst>
               </p:nvPr>
             </p:nvGraphicFramePr>
             <p:xfrm>
-              <a:off x="3747646" y="3271495"/>
+              <a:off x="3937391" y="3308712"/>
               <a:ext cx="2461620" cy="370840"/>
             </p:xfrm>
             <a:graphic>
@@ -6974,7 +7083,7 @@
                           <a:prstDash val="solid"/>
                         </a:lnBlToTr>
                         <a:blipFill>
-                          <a:blip r:embed="rId7"/>
+                          <a:blip r:embed="rId8"/>
                           <a:stretch>
                             <a:fillRect l="-1235" t="-1613" r="-402469" b="-3226"/>
                           </a:stretch>
@@ -7035,7 +7144,7 @@
                           <a:prstDash val="solid"/>
                         </a:lnBlToTr>
                         <a:blipFill>
-                          <a:blip r:embed="rId7"/>
+                          <a:blip r:embed="rId8"/>
                           <a:stretch>
                             <a:fillRect l="-101235" t="-1613" r="-302469" b="-3226"/>
                           </a:stretch>
@@ -7096,7 +7205,7 @@
                           <a:prstDash val="solid"/>
                         </a:lnBlToTr>
                         <a:blipFill>
-                          <a:blip r:embed="rId7"/>
+                          <a:blip r:embed="rId8"/>
                           <a:stretch>
                             <a:fillRect l="-201235" t="-1613" r="-202469" b="-3226"/>
                           </a:stretch>
@@ -7157,7 +7266,7 @@
                           <a:prstDash val="solid"/>
                         </a:lnBlToTr>
                         <a:blipFill>
-                          <a:blip r:embed="rId7"/>
+                          <a:blip r:embed="rId8"/>
                           <a:stretch>
                             <a:fillRect l="-301235" t="-1613" r="-102469" b="-3226"/>
                           </a:stretch>
@@ -7218,7 +7327,7 @@
                           <a:prstDash val="solid"/>
                         </a:lnBlToTr>
                         <a:blipFill>
-                          <a:blip r:embed="rId7"/>
+                          <a:blip r:embed="rId8"/>
                           <a:stretch>
                             <a:fillRect l="-401235" t="-1613" r="-2469" b="-3226"/>
                           </a:stretch>
@@ -7237,8 +7346,8 @@
           </p:graphicFrame>
         </mc:Fallback>
       </mc:AlternateContent>
-      <mc:AlternateContent xmlns:mc="http://schemas.openxmlformats.org/markup-compatibility/2006" xmlns:a14="http://schemas.microsoft.com/office/drawing/2010/main">
-        <mc:Choice Requires="a14">
+      <mc:AlternateContent xmlns:mc="http://schemas.openxmlformats.org/markup-compatibility/2006">
+        <mc:Choice xmlns:a14="http://schemas.microsoft.com/office/drawing/2010/main" Requires="a14">
           <p:sp>
             <p:nvSpPr>
               <p:cNvPr id="44" name="文本框 43">
@@ -7253,8 +7362,8 @@
             </p:nvSpPr>
             <p:spPr>
               <a:xfrm>
-                <a:off x="4372877" y="2994497"/>
-                <a:ext cx="1211165" cy="282000"/>
+                <a:off x="4391290" y="2944970"/>
+                <a:ext cx="1553823" cy="345223"/>
               </a:xfrm>
               <a:prstGeom prst="rect">
                 <a:avLst/>
@@ -7268,7 +7377,7 @@
               <a:lstStyle/>
               <a:p>
                 <a:r>
-                  <a:rPr lang="zh-CN" altLang="en-US" sz="1200" dirty="0">
+                  <a:rPr lang="zh-CN" altLang="en-US" sz="1600" dirty="0">
                     <a:latin typeface="宋体" panose="02010600030101010101" pitchFamily="2" charset="-122"/>
                     <a:ea typeface="宋体" panose="02010600030101010101" pitchFamily="2" charset="-122"/>
                   </a:rPr>
@@ -7277,7 +7386,7 @@
                 <a14:m>
                   <m:oMath xmlns:m="http://schemas.openxmlformats.org/officeDocument/2006/math">
                     <m:r>
-                      <a:rPr lang="zh-CN" altLang="en-US" sz="1200" i="1" dirty="0">
+                      <a:rPr lang="zh-CN" altLang="en-US" sz="1600" i="1" dirty="0">
                         <a:latin typeface="Cambria Math" panose="02040503050406030204" pitchFamily="18" charset="0"/>
                       </a:rPr>
                       <m:t>流量序列</m:t>
@@ -7286,14 +7395,14 @@
                       <m:accPr>
                         <m:chr m:val="̂"/>
                         <m:ctrlPr>
-                          <a:rPr lang="zh-CN" altLang="en-US" sz="1200" i="1" dirty="0">
+                          <a:rPr lang="zh-CN" altLang="en-US" sz="1600" i="1" dirty="0">
                             <a:latin typeface="Cambria Math" panose="02040503050406030204" pitchFamily="18" charset="0"/>
                           </a:rPr>
                         </m:ctrlPr>
                       </m:accPr>
                       <m:e>
                         <m:r>
-                          <a:rPr lang="en-US" altLang="zh-CN" sz="1200" i="1" dirty="0">
+                          <a:rPr lang="en-US" altLang="zh-CN" sz="1600" i="1" dirty="0">
                             <a:latin typeface="Cambria Math" panose="02040503050406030204" pitchFamily="18" charset="0"/>
                           </a:rPr>
                           <m:t>𝑋</m:t>
@@ -7302,7 +7411,7 @@
                     </m:acc>
                   </m:oMath>
                 </a14:m>
-                <a:endParaRPr lang="zh-CN" altLang="en-US" sz="1200" dirty="0">
+                <a:endParaRPr lang="zh-CN" altLang="en-US" sz="1600" dirty="0">
                   <a:latin typeface="宋体" panose="02010600030101010101" pitchFamily="2" charset="-122"/>
                   <a:ea typeface="宋体" panose="02010600030101010101" pitchFamily="2" charset="-122"/>
                 </a:endParaRPr>
@@ -7310,7 +7419,7 @@
             </p:txBody>
           </p:sp>
         </mc:Choice>
-        <mc:Fallback xmlns="">
+        <mc:Fallback>
           <p:sp>
             <p:nvSpPr>
               <p:cNvPr id="44" name="文本框 43">
@@ -7327,16 +7436,16 @@
             </p:nvSpPr>
             <p:spPr>
               <a:xfrm>
-                <a:off x="4372877" y="2994497"/>
-                <a:ext cx="1211165" cy="282000"/>
+                <a:off x="4391290" y="2944970"/>
+                <a:ext cx="1553823" cy="345223"/>
               </a:xfrm>
               <a:prstGeom prst="rect">
                 <a:avLst/>
               </a:prstGeom>
               <a:blipFill>
-                <a:blip r:embed="rId8"/>
+                <a:blip r:embed="rId9"/>
                 <a:stretch>
-                  <a:fillRect r="-12060" b="-15217"/>
+                  <a:fillRect l="-1961" t="-5263" r="-13333" b="-19298"/>
                 </a:stretch>
               </a:blipFill>
             </p:spPr>
@@ -7373,8 +7482,8 @@
         </p:nvCxnSpPr>
         <p:spPr>
           <a:xfrm flipH="1" flipV="1">
-            <a:off x="6209267" y="3456916"/>
-            <a:ext cx="908813" cy="1793"/>
+            <a:off x="6399012" y="3494133"/>
+            <a:ext cx="1258435" cy="1793"/>
           </a:xfrm>
           <a:prstGeom prst="straightConnector1">
             <a:avLst/>
@@ -7412,8 +7521,8 @@
         </p:nvSpPr>
         <p:spPr>
           <a:xfrm>
-            <a:off x="6244519" y="3178834"/>
-            <a:ext cx="800219" cy="276999"/>
+            <a:off x="6480873" y="3202243"/>
+            <a:ext cx="1083319" cy="338554"/>
           </a:xfrm>
           <a:prstGeom prst="rect">
             <a:avLst/>
@@ -7427,7 +7536,7 @@
           <a:lstStyle/>
           <a:p>
             <a:r>
-              <a:rPr lang="zh-CN" altLang="en-US" sz="1200" dirty="0">
+              <a:rPr lang="zh-CN" altLang="en-US" sz="1600" dirty="0">
                 <a:latin typeface="宋体" panose="02010600030101010101" pitchFamily="2" charset="-122"/>
                 <a:ea typeface="宋体" panose="02010600030101010101" pitchFamily="2" charset="-122"/>
               </a:rPr>
@@ -7450,7 +7559,7 @@
         </p:nvSpPr>
         <p:spPr>
           <a:xfrm rot="5400000">
-            <a:off x="1277818" y="2591"/>
+            <a:off x="1467563" y="39807"/>
             <a:ext cx="206538" cy="2461620"/>
           </a:xfrm>
           <a:prstGeom prst="rightBrace">
@@ -7484,12 +7593,12 @@
           <a:lstStyle/>
           <a:p>
             <a:pPr algn="ctr"/>
-            <a:endParaRPr lang="zh-CN" altLang="en-US"/>
+            <a:endParaRPr lang="zh-CN" altLang="en-US" sz="2400"/>
           </a:p>
         </p:txBody>
       </p:sp>
-      <mc:AlternateContent xmlns:mc="http://schemas.openxmlformats.org/markup-compatibility/2006" xmlns:a14="http://schemas.microsoft.com/office/drawing/2010/main">
-        <mc:Choice Requires="a14">
+      <mc:AlternateContent xmlns:mc="http://schemas.openxmlformats.org/markup-compatibility/2006">
+        <mc:Choice xmlns:a14="http://schemas.microsoft.com/office/drawing/2010/main" Requires="a14">
           <p:sp>
             <p:nvSpPr>
               <p:cNvPr id="51" name="文本框 50">
@@ -7504,8 +7613,8 @@
             </p:nvSpPr>
             <p:spPr>
               <a:xfrm>
-                <a:off x="1010537" y="1369981"/>
-                <a:ext cx="741100" cy="276999"/>
+                <a:off x="1097141" y="1407198"/>
+                <a:ext cx="926536" cy="338554"/>
               </a:xfrm>
               <a:prstGeom prst="rect">
                 <a:avLst/>
@@ -7519,7 +7628,7 @@
               <a:lstStyle/>
               <a:p>
                 <a:r>
-                  <a:rPr lang="zh-CN" altLang="en-US" sz="1200" dirty="0">
+                  <a:rPr lang="zh-CN" altLang="en-US" sz="1600" dirty="0">
                     <a:latin typeface="宋体" panose="02010600030101010101" pitchFamily="2" charset="-122"/>
                     <a:ea typeface="宋体" panose="02010600030101010101" pitchFamily="2" charset="-122"/>
                   </a:rPr>
@@ -7528,7 +7637,7 @@
                 <a14:m>
                   <m:oMath xmlns:m="http://schemas.openxmlformats.org/officeDocument/2006/math">
                     <m:r>
-                      <a:rPr lang="en-US" altLang="zh-CN" sz="1200" i="1">
+                      <a:rPr lang="en-US" altLang="zh-CN" sz="1600" i="1">
                         <a:latin typeface="Cambria Math" panose="02040503050406030204" pitchFamily="18" charset="0"/>
                         <a:ea typeface="宋体" panose="02010600030101010101" pitchFamily="2" charset="-122"/>
                       </a:rPr>
@@ -7536,7 +7645,7 @@
                     </m:r>
                   </m:oMath>
                 </a14:m>
-                <a:endParaRPr lang="zh-CN" altLang="en-US" sz="1200" dirty="0">
+                <a:endParaRPr lang="zh-CN" altLang="en-US" sz="1600" dirty="0">
                   <a:latin typeface="宋体" panose="02010600030101010101" pitchFamily="2" charset="-122"/>
                   <a:ea typeface="宋体" panose="02010600030101010101" pitchFamily="2" charset="-122"/>
                 </a:endParaRPr>
@@ -7544,7 +7653,7 @@
             </p:txBody>
           </p:sp>
         </mc:Choice>
-        <mc:Fallback xmlns="">
+        <mc:Fallback>
           <p:sp>
             <p:nvSpPr>
               <p:cNvPr id="51" name="文本框 50">
@@ -7561,16 +7670,16 @@
             </p:nvSpPr>
             <p:spPr>
               <a:xfrm>
-                <a:off x="1010537" y="1369981"/>
-                <a:ext cx="741100" cy="276999"/>
+                <a:off x="1097141" y="1407198"/>
+                <a:ext cx="926536" cy="338554"/>
               </a:xfrm>
               <a:prstGeom prst="rect">
                 <a:avLst/>
               </a:prstGeom>
               <a:blipFill>
-                <a:blip r:embed="rId9"/>
+                <a:blip r:embed="rId10"/>
                 <a:stretch>
-                  <a:fillRect l="-826" t="-2222" b="-17778"/>
+                  <a:fillRect l="-3947" t="-7273" b="-21818"/>
                 </a:stretch>
               </a:blipFill>
             </p:spPr>
@@ -7603,7 +7712,7 @@
         </p:nvSpPr>
         <p:spPr>
           <a:xfrm>
-            <a:off x="859955" y="2949605"/>
+            <a:off x="1049701" y="2986822"/>
             <a:ext cx="1008000" cy="1008000"/>
           </a:xfrm>
           <a:prstGeom prst="flowChartConnector">
@@ -7639,12 +7748,12 @@
           <a:lstStyle/>
           <a:p>
             <a:pPr algn="ctr"/>
-            <a:endParaRPr lang="zh-CN" altLang="en-US"/>
+            <a:endParaRPr lang="zh-CN" altLang="en-US" sz="2400"/>
           </a:p>
         </p:txBody>
       </p:sp>
-      <mc:AlternateContent xmlns:mc="http://schemas.openxmlformats.org/markup-compatibility/2006" xmlns:a14="http://schemas.microsoft.com/office/drawing/2010/main">
-        <mc:Choice Requires="a14">
+      <mc:AlternateContent xmlns:mc="http://schemas.openxmlformats.org/markup-compatibility/2006">
+        <mc:Choice xmlns:a14="http://schemas.microsoft.com/office/drawing/2010/main" Requires="a14">
           <p:sp>
             <p:nvSpPr>
               <p:cNvPr id="53" name="文本框 52">
@@ -7659,8 +7768,8 @@
             </p:nvSpPr>
             <p:spPr>
               <a:xfrm>
-                <a:off x="1006399" y="3231096"/>
-                <a:ext cx="739240" cy="338554"/>
+                <a:off x="1196146" y="3268312"/>
+                <a:ext cx="877099" cy="400110"/>
               </a:xfrm>
               <a:prstGeom prst="rect">
                 <a:avLst/>
@@ -7683,7 +7792,7 @@
                       <m:sSub>
                         <m:sSubPr>
                           <m:ctrlPr>
-                            <a:rPr lang="en-US" altLang="zh-CN" sz="1600" i="1">
+                            <a:rPr lang="en-US" altLang="zh-CN" sz="2000" i="1">
                               <a:latin typeface="Cambria Math" panose="02040503050406030204" pitchFamily="18" charset="0"/>
                               <a:ea typeface="Cambria Math" panose="02040503050406030204" pitchFamily="18" charset="0"/>
                             </a:rPr>
@@ -7691,7 +7800,7 @@
                         </m:sSubPr>
                         <m:e>
                           <m:r>
-                            <a:rPr lang="en-US" altLang="zh-CN" sz="1600" i="1">
+                            <a:rPr lang="en-US" altLang="zh-CN" sz="2000" i="1">
                               <a:latin typeface="Cambria Math" panose="02040503050406030204" pitchFamily="18" charset="0"/>
                               <a:ea typeface="Cambria Math" panose="02040503050406030204" pitchFamily="18" charset="0"/>
                             </a:rPr>
@@ -7700,7 +7809,7 @@
                         </m:e>
                         <m:sub>
                           <m:r>
-                            <a:rPr lang="en-US" altLang="zh-CN" sz="1600" i="1">
+                            <a:rPr lang="en-US" altLang="zh-CN" sz="2000" i="1">
                               <a:latin typeface="Cambria Math" panose="02040503050406030204" pitchFamily="18" charset="0"/>
                               <a:ea typeface="Cambria Math" panose="02040503050406030204" pitchFamily="18" charset="0"/>
                             </a:rPr>
@@ -7711,7 +7820,7 @@
                     </m:oMath>
                   </m:oMathPara>
                 </a14:m>
-                <a:endParaRPr lang="zh-CN" altLang="en-US" sz="1600" dirty="0">
+                <a:endParaRPr lang="zh-CN" altLang="en-US" sz="2000" dirty="0">
                   <a:latin typeface="宋体" panose="02010600030101010101" pitchFamily="2" charset="-122"/>
                   <a:ea typeface="宋体" panose="02010600030101010101" pitchFamily="2" charset="-122"/>
                 </a:endParaRPr>
@@ -7719,7 +7828,7 @@
             </p:txBody>
           </p:sp>
         </mc:Choice>
-        <mc:Fallback xmlns="">
+        <mc:Fallback>
           <p:sp>
             <p:nvSpPr>
               <p:cNvPr id="53" name="文本框 52">
@@ -7736,16 +7845,16 @@
             </p:nvSpPr>
             <p:spPr>
               <a:xfrm>
-                <a:off x="1006399" y="3231096"/>
-                <a:ext cx="739240" cy="338554"/>
+                <a:off x="1196146" y="3268312"/>
+                <a:ext cx="877099" cy="400110"/>
               </a:xfrm>
               <a:prstGeom prst="rect">
                 <a:avLst/>
               </a:prstGeom>
               <a:blipFill>
-                <a:blip r:embed="rId10"/>
+                <a:blip r:embed="rId11"/>
                 <a:stretch>
-                  <a:fillRect/>
+                  <a:fillRect b="-3030"/>
                 </a:stretch>
               </a:blipFill>
             </p:spPr>
@@ -7782,8 +7891,8 @@
         </p:nvCxnSpPr>
         <p:spPr>
           <a:xfrm flipH="1">
-            <a:off x="1363955" y="1646979"/>
-            <a:ext cx="17132" cy="1302626"/>
+            <a:off x="1553701" y="1745752"/>
+            <a:ext cx="6708" cy="1241070"/>
           </a:xfrm>
           <a:prstGeom prst="straightConnector1">
             <a:avLst/>
@@ -7825,8 +7934,8 @@
         </p:nvSpPr>
         <p:spPr>
           <a:xfrm>
-            <a:off x="515139" y="2159795"/>
-            <a:ext cx="954107" cy="276999"/>
+            <a:off x="424106" y="2408416"/>
+            <a:ext cx="1210588" cy="338554"/>
           </a:xfrm>
           <a:prstGeom prst="rect">
             <a:avLst/>
@@ -7840,7 +7949,7 @@
           <a:lstStyle/>
           <a:p>
             <a:r>
-              <a:rPr lang="zh-CN" altLang="en-US" sz="1200" dirty="0">
+              <a:rPr lang="zh-CN" altLang="en-US" sz="1600" dirty="0">
                 <a:latin typeface="宋体" panose="02010600030101010101" pitchFamily="2" charset="-122"/>
                 <a:ea typeface="宋体" panose="02010600030101010101" pitchFamily="2" charset="-122"/>
               </a:rPr>
@@ -7867,8 +7976,8 @@
         </p:nvCxnSpPr>
         <p:spPr>
           <a:xfrm flipH="1" flipV="1">
-            <a:off x="1867956" y="3453605"/>
-            <a:ext cx="1879691" cy="3310"/>
+            <a:off x="2057701" y="3490822"/>
+            <a:ext cx="1879690" cy="3310"/>
           </a:xfrm>
           <a:prstGeom prst="straightConnector1">
             <a:avLst/>
@@ -7912,7 +8021,7 @@
         </p:nvCxnSpPr>
         <p:spPr>
           <a:xfrm>
-            <a:off x="8452504" y="941454"/>
+            <a:off x="8991870" y="978670"/>
             <a:ext cx="637708" cy="0"/>
           </a:xfrm>
           <a:prstGeom prst="straightConnector1">
@@ -7951,8 +8060,8 @@
         </p:nvSpPr>
         <p:spPr>
           <a:xfrm>
-            <a:off x="8585918" y="620793"/>
-            <a:ext cx="800219" cy="276999"/>
+            <a:off x="8920308" y="643526"/>
+            <a:ext cx="1005403" cy="338554"/>
           </a:xfrm>
           <a:prstGeom prst="rect">
             <a:avLst/>
@@ -7966,7 +8075,7 @@
           <a:lstStyle/>
           <a:p>
             <a:r>
-              <a:rPr lang="zh-CN" altLang="en-US" sz="1200" dirty="0">
+              <a:rPr lang="zh-CN" altLang="en-US" sz="1600" dirty="0">
                 <a:latin typeface="宋体" panose="02010600030101010101" pitchFamily="2" charset="-122"/>
                 <a:ea typeface="宋体" panose="02010600030101010101" pitchFamily="2" charset="-122"/>
               </a:rPr>
@@ -7975,44 +8084,335 @@
           </a:p>
         </p:txBody>
       </p:sp>
-      <p:sp>
-        <p:nvSpPr>
-          <p:cNvPr id="41" name="文本框 40">
-            <a:extLst>
-              <a:ext uri="{FF2B5EF4-FFF2-40B4-BE49-F238E27FC236}">
-                <a16:creationId xmlns:a16="http://schemas.microsoft.com/office/drawing/2014/main" id="{5654D89B-8962-4E14-A405-9B2DF20A63E4}"/>
-              </a:ext>
-            </a:extLst>
-          </p:cNvPr>
-          <p:cNvSpPr txBox="1"/>
-          <p:nvPr/>
-        </p:nvSpPr>
-        <p:spPr>
-          <a:xfrm>
-            <a:off x="8585917" y="1041740"/>
-            <a:ext cx="800219" cy="276999"/>
-          </a:xfrm>
-          <a:prstGeom prst="rect">
-            <a:avLst/>
-          </a:prstGeom>
-          <a:noFill/>
-        </p:spPr>
-        <p:txBody>
-          <a:bodyPr wrap="none" rtlCol="0">
-            <a:spAutoFit/>
-          </a:bodyPr>
-          <a:lstStyle/>
-          <a:p>
-            <a:r>
-              <a:rPr lang="zh-CN" altLang="en-US" sz="1200" dirty="0">
-                <a:latin typeface="宋体" panose="02010600030101010101" pitchFamily="2" charset="-122"/>
-                <a:ea typeface="宋体" panose="02010600030101010101" pitchFamily="2" charset="-122"/>
-              </a:rPr>
-              <a:t>隐藏表示</a:t>
-            </a:r>
-          </a:p>
-        </p:txBody>
-      </p:sp>
+      <mc:AlternateContent xmlns:mc="http://schemas.openxmlformats.org/markup-compatibility/2006">
+        <mc:Choice xmlns:a14="http://schemas.microsoft.com/office/drawing/2010/main" Requires="a14">
+          <p:sp>
+            <p:nvSpPr>
+              <p:cNvPr id="47" name="文本框 46">
+                <a:extLst>
+                  <a:ext uri="{FF2B5EF4-FFF2-40B4-BE49-F238E27FC236}">
+                    <a16:creationId xmlns:a16="http://schemas.microsoft.com/office/drawing/2014/main" id="{F54A9D29-B575-4FE2-BE23-AE7E5AFF9A48}"/>
+                  </a:ext>
+                </a:extLst>
+              </p:cNvPr>
+              <p:cNvSpPr txBox="1"/>
+              <p:nvPr/>
+            </p:nvSpPr>
+            <p:spPr>
+              <a:xfrm>
+                <a:off x="8906437" y="985488"/>
+                <a:ext cx="1116011" cy="338554"/>
+              </a:xfrm>
+              <a:prstGeom prst="rect">
+                <a:avLst/>
+              </a:prstGeom>
+              <a:noFill/>
+            </p:spPr>
+            <p:txBody>
+              <a:bodyPr wrap="none" rtlCol="0">
+                <a:spAutoFit/>
+              </a:bodyPr>
+              <a:lstStyle/>
+              <a:p>
+                <a:r>
+                  <a:rPr lang="zh-CN" altLang="en-US" sz="1600" dirty="0">
+                    <a:latin typeface="宋体" panose="02010600030101010101" pitchFamily="2" charset="-122"/>
+                    <a:ea typeface="宋体" panose="02010600030101010101" pitchFamily="2" charset="-122"/>
+                  </a:rPr>
+                  <a:t>隐藏表示</a:t>
+                </a:r>
+                <a14:m>
+                  <m:oMath xmlns:m="http://schemas.openxmlformats.org/officeDocument/2006/math">
+                    <m:r>
+                      <m:rPr>
+                        <m:sty m:val="p"/>
+                      </m:rPr>
+                      <a:rPr lang="el-GR" altLang="zh-CN" sz="1600" i="1">
+                        <a:latin typeface="Cambria Math" panose="02040503050406030204" pitchFamily="18" charset="0"/>
+                        <a:ea typeface="Cambria Math" panose="02040503050406030204" pitchFamily="18" charset="0"/>
+                      </a:rPr>
+                      <m:t>Ζ</m:t>
+                    </m:r>
+                  </m:oMath>
+                </a14:m>
+                <a:endParaRPr lang="zh-CN" altLang="en-US" sz="1600" dirty="0">
+                  <a:latin typeface="宋体" panose="02010600030101010101" pitchFamily="2" charset="-122"/>
+                  <a:ea typeface="宋体" panose="02010600030101010101" pitchFamily="2" charset="-122"/>
+                </a:endParaRPr>
+              </a:p>
+            </p:txBody>
+          </p:sp>
+        </mc:Choice>
+        <mc:Fallback>
+          <p:sp>
+            <p:nvSpPr>
+              <p:cNvPr id="47" name="文本框 46">
+                <a:extLst>
+                  <a:ext uri="{FF2B5EF4-FFF2-40B4-BE49-F238E27FC236}">
+                    <a16:creationId xmlns:a16="http://schemas.microsoft.com/office/drawing/2014/main" id="{F54A9D29-B575-4FE2-BE23-AE7E5AFF9A48}"/>
+                  </a:ext>
+                </a:extLst>
+              </p:cNvPr>
+              <p:cNvSpPr txBox="1">
+                <a:spLocks noRot="1" noChangeAspect="1" noMove="1" noResize="1" noEditPoints="1" noAdjustHandles="1" noChangeArrowheads="1" noChangeShapeType="1" noTextEdit="1"/>
+              </p:cNvSpPr>
+              <p:nvPr/>
+            </p:nvSpPr>
+            <p:spPr>
+              <a:xfrm>
+                <a:off x="8906437" y="985488"/>
+                <a:ext cx="1116011" cy="338554"/>
+              </a:xfrm>
+              <a:prstGeom prst="rect">
+                <a:avLst/>
+              </a:prstGeom>
+              <a:blipFill>
+                <a:blip r:embed="rId12"/>
+                <a:stretch>
+                  <a:fillRect l="-2732" t="-7273" b="-21818"/>
+                </a:stretch>
+              </a:blipFill>
+            </p:spPr>
+            <p:txBody>
+              <a:bodyPr/>
+              <a:lstStyle/>
+              <a:p>
+                <a:r>
+                  <a:rPr lang="zh-CN" altLang="en-US">
+                    <a:noFill/>
+                  </a:rPr>
+                  <a:t> </a:t>
+                </a:r>
+              </a:p>
+            </p:txBody>
+          </p:sp>
+        </mc:Fallback>
+      </mc:AlternateContent>
+      <mc:AlternateContent xmlns:mc="http://schemas.openxmlformats.org/markup-compatibility/2006">
+        <mc:Choice xmlns:a14="http://schemas.microsoft.com/office/drawing/2010/main" Requires="a14">
+          <p:sp>
+            <p:nvSpPr>
+              <p:cNvPr id="48" name="文本框 47">
+                <a:extLst>
+                  <a:ext uri="{FF2B5EF4-FFF2-40B4-BE49-F238E27FC236}">
+                    <a16:creationId xmlns:a16="http://schemas.microsoft.com/office/drawing/2014/main" id="{0E04D1E8-606A-4E3E-8B7B-95047AC628FD}"/>
+                  </a:ext>
+                </a:extLst>
+              </p:cNvPr>
+              <p:cNvSpPr txBox="1"/>
+              <p:nvPr/>
+            </p:nvSpPr>
+            <p:spPr>
+              <a:xfrm>
+                <a:off x="3949936" y="1149638"/>
+                <a:ext cx="2270365" cy="348813"/>
+              </a:xfrm>
+              <a:prstGeom prst="rect">
+                <a:avLst/>
+              </a:prstGeom>
+              <a:noFill/>
+            </p:spPr>
+            <p:txBody>
+              <a:bodyPr wrap="none" rtlCol="0">
+                <a:spAutoFit/>
+              </a:bodyPr>
+              <a:lstStyle/>
+              <a:p>
+                <a14:m>
+                  <m:oMathPara xmlns:m="http://schemas.openxmlformats.org/officeDocument/2006/math">
+                    <m:oMathParaPr>
+                      <m:jc m:val="centerGroup"/>
+                    </m:oMathParaPr>
+                    <m:oMath xmlns:m="http://schemas.openxmlformats.org/officeDocument/2006/math">
+                      <m:sSup>
+                        <m:sSupPr>
+                          <m:ctrlPr>
+                            <a:rPr lang="en-US" altLang="zh-CN" sz="1600" i="1">
+                              <a:latin typeface="Cambria Math" panose="02040503050406030204" pitchFamily="18" charset="0"/>
+                              <a:ea typeface="宋体" panose="02010600030101010101" pitchFamily="2" charset="-122"/>
+                            </a:rPr>
+                          </m:ctrlPr>
+                        </m:sSupPr>
+                        <m:e>
+                          <m:r>
+                            <a:rPr lang="en-US" altLang="zh-CN" sz="1600" i="1">
+                              <a:latin typeface="Cambria Math" panose="02040503050406030204" pitchFamily="18" charset="0"/>
+                              <a:ea typeface="宋体" panose="02010600030101010101" pitchFamily="2" charset="-122"/>
+                            </a:rPr>
+                            <m:t>𝐻</m:t>
+                          </m:r>
+                        </m:e>
+                        <m:sup>
+                          <m:r>
+                            <a:rPr lang="en-US" altLang="zh-CN" sz="1600" i="1">
+                              <a:latin typeface="Cambria Math" panose="02040503050406030204" pitchFamily="18" charset="0"/>
+                              <a:ea typeface="宋体" panose="02010600030101010101" pitchFamily="2" charset="-122"/>
+                            </a:rPr>
+                            <m:t>(0)</m:t>
+                          </m:r>
+                        </m:sup>
+                      </m:sSup>
+                      <m:r>
+                        <a:rPr lang="en-US" altLang="zh-CN" sz="1600" i="1">
+                          <a:latin typeface="Cambria Math" panose="02040503050406030204" pitchFamily="18" charset="0"/>
+                          <a:ea typeface="宋体" panose="02010600030101010101" pitchFamily="2" charset="-122"/>
+                        </a:rPr>
+                        <m:t>=</m:t>
+                      </m:r>
+                      <m:sSub>
+                        <m:sSubPr>
+                          <m:ctrlPr>
+                            <a:rPr lang="en-US" altLang="zh-CN" sz="1600" i="1">
+                              <a:latin typeface="Cambria Math" panose="02040503050406030204" pitchFamily="18" charset="0"/>
+                              <a:ea typeface="宋体" panose="02010600030101010101" pitchFamily="2" charset="-122"/>
+                            </a:rPr>
+                          </m:ctrlPr>
+                        </m:sSubPr>
+                        <m:e>
+                          <m:r>
+                            <a:rPr lang="en-US" altLang="zh-CN" sz="1600" i="1">
+                              <a:latin typeface="Cambria Math" panose="02040503050406030204" pitchFamily="18" charset="0"/>
+                              <a:ea typeface="宋体" panose="02010600030101010101" pitchFamily="2" charset="-122"/>
+                            </a:rPr>
+                            <m:t>𝑋</m:t>
+                          </m:r>
+                        </m:e>
+                        <m:sub>
+                          <m:r>
+                            <a:rPr lang="en-US" altLang="zh-CN" sz="1600" i="1">
+                              <a:latin typeface="Cambria Math" panose="02040503050406030204" pitchFamily="18" charset="0"/>
+                              <a:ea typeface="宋体" panose="02010600030101010101" pitchFamily="2" charset="-122"/>
+                            </a:rPr>
+                            <m:t>𝑣𝑖𝑠</m:t>
+                          </m:r>
+                        </m:sub>
+                      </m:sSub>
+                      <m:sSub>
+                        <m:sSubPr>
+                          <m:ctrlPr>
+                            <a:rPr lang="en-US" altLang="zh-CN" sz="1600" i="1">
+                              <a:latin typeface="Cambria Math" panose="02040503050406030204" pitchFamily="18" charset="0"/>
+                              <a:ea typeface="宋体" panose="02010600030101010101" pitchFamily="2" charset="-122"/>
+                            </a:rPr>
+                          </m:ctrlPr>
+                        </m:sSubPr>
+                        <m:e>
+                          <m:r>
+                            <a:rPr lang="en-US" altLang="zh-CN" sz="1600" i="1">
+                              <a:latin typeface="Cambria Math" panose="02040503050406030204" pitchFamily="18" charset="0"/>
+                              <a:ea typeface="宋体" panose="02010600030101010101" pitchFamily="2" charset="-122"/>
+                            </a:rPr>
+                            <m:t>𝑊</m:t>
+                          </m:r>
+                        </m:e>
+                        <m:sub>
+                          <m:r>
+                            <a:rPr lang="en-US" altLang="zh-CN" sz="1600" i="1">
+                              <a:latin typeface="Cambria Math" panose="02040503050406030204" pitchFamily="18" charset="0"/>
+                              <a:ea typeface="宋体" panose="02010600030101010101" pitchFamily="2" charset="-122"/>
+                            </a:rPr>
+                            <m:t>𝐸</m:t>
+                          </m:r>
+                        </m:sub>
+                      </m:sSub>
+                      <m:r>
+                        <a:rPr lang="en-US" altLang="zh-CN" sz="1600" i="1">
+                          <a:latin typeface="Cambria Math" panose="02040503050406030204" pitchFamily="18" charset="0"/>
+                          <a:ea typeface="宋体" panose="02010600030101010101" pitchFamily="2" charset="-122"/>
+                        </a:rPr>
+                        <m:t>+</m:t>
+                      </m:r>
+                      <m:r>
+                        <a:rPr lang="en-US" altLang="zh-CN" sz="1600" i="1">
+                          <a:latin typeface="Cambria Math" panose="02040503050406030204" pitchFamily="18" charset="0"/>
+                          <a:ea typeface="宋体" panose="02010600030101010101" pitchFamily="2" charset="-122"/>
+                        </a:rPr>
+                        <m:t>𝑃</m:t>
+                      </m:r>
+                      <m:sSub>
+                        <m:sSubPr>
+                          <m:ctrlPr>
+                            <a:rPr lang="en-US" altLang="zh-CN" sz="1600" i="1">
+                              <a:latin typeface="Cambria Math" panose="02040503050406030204" pitchFamily="18" charset="0"/>
+                              <a:ea typeface="宋体" panose="02010600030101010101" pitchFamily="2" charset="-122"/>
+                            </a:rPr>
+                          </m:ctrlPr>
+                        </m:sSubPr>
+                        <m:e>
+                          <m:r>
+                            <a:rPr lang="en-US" altLang="zh-CN" sz="1600" i="1">
+                              <a:latin typeface="Cambria Math" panose="02040503050406030204" pitchFamily="18" charset="0"/>
+                              <a:ea typeface="宋体" panose="02010600030101010101" pitchFamily="2" charset="-122"/>
+                            </a:rPr>
+                            <m:t>𝐸</m:t>
+                          </m:r>
+                        </m:e>
+                        <m:sub>
+                          <m:r>
+                            <a:rPr lang="en-US" altLang="zh-CN" sz="1600" i="1">
+                              <a:latin typeface="Cambria Math" panose="02040503050406030204" pitchFamily="18" charset="0"/>
+                              <a:ea typeface="宋体" panose="02010600030101010101" pitchFamily="2" charset="-122"/>
+                            </a:rPr>
+                            <m:t>𝑣𝑖𝑠</m:t>
+                          </m:r>
+                        </m:sub>
+                      </m:sSub>
+                    </m:oMath>
+                  </m:oMathPara>
+                </a14:m>
+                <a:endParaRPr lang="zh-CN" altLang="en-US" sz="1600" dirty="0">
+                  <a:latin typeface="宋体" panose="02010600030101010101" pitchFamily="2" charset="-122"/>
+                  <a:ea typeface="宋体" panose="02010600030101010101" pitchFamily="2" charset="-122"/>
+                </a:endParaRPr>
+              </a:p>
+            </p:txBody>
+          </p:sp>
+        </mc:Choice>
+        <mc:Fallback>
+          <p:sp>
+            <p:nvSpPr>
+              <p:cNvPr id="48" name="文本框 47">
+                <a:extLst>
+                  <a:ext uri="{FF2B5EF4-FFF2-40B4-BE49-F238E27FC236}">
+                    <a16:creationId xmlns:a16="http://schemas.microsoft.com/office/drawing/2014/main" id="{0E04D1E8-606A-4E3E-8B7B-95047AC628FD}"/>
+                  </a:ext>
+                </a:extLst>
+              </p:cNvPr>
+              <p:cNvSpPr txBox="1">
+                <a:spLocks noRot="1" noChangeAspect="1" noMove="1" noResize="1" noEditPoints="1" noAdjustHandles="1" noChangeArrowheads="1" noChangeShapeType="1" noTextEdit="1"/>
+              </p:cNvSpPr>
+              <p:nvPr/>
+            </p:nvSpPr>
+            <p:spPr>
+              <a:xfrm>
+                <a:off x="3949936" y="1149638"/>
+                <a:ext cx="2270365" cy="348813"/>
+              </a:xfrm>
+              <a:prstGeom prst="rect">
+                <a:avLst/>
+              </a:prstGeom>
+              <a:blipFill>
+                <a:blip r:embed="rId13"/>
+                <a:stretch>
+                  <a:fillRect/>
+                </a:stretch>
+              </a:blipFill>
+            </p:spPr>
+            <p:txBody>
+              <a:bodyPr/>
+              <a:lstStyle/>
+              <a:p>
+                <a:r>
+                  <a:rPr lang="zh-CN" altLang="en-US">
+                    <a:noFill/>
+                  </a:rPr>
+                  <a:t> </a:t>
+                </a:r>
+              </a:p>
+            </p:txBody>
+          </p:sp>
+        </mc:Fallback>
+      </mc:AlternateContent>
     </p:spTree>
     <p:extLst>
       <p:ext uri="{BB962C8B-B14F-4D97-AF65-F5344CB8AC3E}">
